--- a/Dissertation_Briefing_711.pptx
+++ b/Dissertation_Briefing_711.pptx
@@ -5,21 +5,23 @@
     <p:sldMasterId id="2147483686" r:id="rId1"/>
   </p:sldMasterIdLst>
   <p:notesMasterIdLst>
-    <p:notesMasterId r:id="rId14"/>
+    <p:notesMasterId r:id="rId16"/>
   </p:notesMasterIdLst>
   <p:sldIdLst>
     <p:sldId id="256" r:id="rId2"/>
-    <p:sldId id="281" r:id="rId3"/>
-    <p:sldId id="284" r:id="rId4"/>
-    <p:sldId id="282" r:id="rId5"/>
-    <p:sldId id="283" r:id="rId6"/>
-    <p:sldId id="287" r:id="rId7"/>
-    <p:sldId id="289" r:id="rId8"/>
-    <p:sldId id="291" r:id="rId9"/>
-    <p:sldId id="292" r:id="rId10"/>
-    <p:sldId id="293" r:id="rId11"/>
+    <p:sldId id="293" r:id="rId3"/>
+    <p:sldId id="281" r:id="rId4"/>
+    <p:sldId id="302" r:id="rId5"/>
+    <p:sldId id="297" r:id="rId6"/>
+    <p:sldId id="284" r:id="rId7"/>
+    <p:sldId id="300" r:id="rId8"/>
+    <p:sldId id="299" r:id="rId9"/>
+    <p:sldId id="303" r:id="rId10"/>
+    <p:sldId id="301" r:id="rId11"/>
     <p:sldId id="290" r:id="rId12"/>
-    <p:sldId id="268" r:id="rId13"/>
+    <p:sldId id="304" r:id="rId13"/>
+    <p:sldId id="305" r:id="rId14"/>
+    <p:sldId id="268" r:id="rId15"/>
   </p:sldIdLst>
   <p:sldSz cx="12192000" cy="6858000"/>
   <p:notesSz cx="6858000" cy="9144000"/>
@@ -481,7 +483,13 @@
   <p:cSld>
     <p:spTree>
       <p:nvGrpSpPr>
-        <p:cNvPr id="1" name=""/>
+        <p:cNvPr id="1" name="">
+          <a:extLst>
+            <a:ext uri="{FF2B5EF4-FFF2-40B4-BE49-F238E27FC236}">
+              <a16:creationId xmlns:a16="http://schemas.microsoft.com/office/drawing/2014/main" id="{71A3358D-947D-8699-EBDF-2DD85AD213D5}"/>
+            </a:ext>
+          </a:extLst>
+        </p:cNvPr>
         <p:cNvGrpSpPr/>
         <p:nvPr/>
       </p:nvGrpSpPr>
@@ -495,7 +503,13 @@
       </p:grpSpPr>
       <p:sp>
         <p:nvSpPr>
-          <p:cNvPr id="2" name="Slide Image Placeholder 1"/>
+          <p:cNvPr id="2" name="Slide Image Placeholder 1">
+            <a:extLst>
+              <a:ext uri="{FF2B5EF4-FFF2-40B4-BE49-F238E27FC236}">
+                <a16:creationId xmlns:a16="http://schemas.microsoft.com/office/drawing/2014/main" id="{C1A7D19C-D14F-88A7-F0C5-B724DC9BFE27}"/>
+              </a:ext>
+            </a:extLst>
+          </p:cNvPr>
           <p:cNvSpPr>
             <a:spLocks noGrp="1" noRot="1" noChangeAspect="1"/>
           </p:cNvSpPr>
@@ -507,7 +521,13 @@
       </p:sp>
       <p:sp>
         <p:nvSpPr>
-          <p:cNvPr id="3" name="Notes Placeholder 2"/>
+          <p:cNvPr id="3" name="Notes Placeholder 2">
+            <a:extLst>
+              <a:ext uri="{FF2B5EF4-FFF2-40B4-BE49-F238E27FC236}">
+                <a16:creationId xmlns:a16="http://schemas.microsoft.com/office/drawing/2014/main" id="{8A895F33-D0F8-6986-2705-C398D48C21A2}"/>
+              </a:ext>
+            </a:extLst>
+          </p:cNvPr>
           <p:cNvSpPr>
             <a:spLocks noGrp="1"/>
           </p:cNvSpPr>
@@ -526,7 +546,13 @@
       </p:sp>
       <p:sp>
         <p:nvSpPr>
-          <p:cNvPr id="4" name="Slide Number Placeholder 3"/>
+          <p:cNvPr id="4" name="Slide Number Placeholder 3">
+            <a:extLst>
+              <a:ext uri="{FF2B5EF4-FFF2-40B4-BE49-F238E27FC236}">
+                <a16:creationId xmlns:a16="http://schemas.microsoft.com/office/drawing/2014/main" id="{1E8006A8-5EF4-F32A-BE65-6DF05B5358CF}"/>
+              </a:ext>
+            </a:extLst>
+          </p:cNvPr>
           <p:cNvSpPr>
             <a:spLocks noGrp="1"/>
           </p:cNvSpPr>
@@ -550,7 +576,7 @@
     </p:spTree>
     <p:extLst>
       <p:ext uri="{BB962C8B-B14F-4D97-AF65-F5344CB8AC3E}">
-        <p14:creationId xmlns:p14="http://schemas.microsoft.com/office/powerpoint/2010/main" val="1563715086"/>
+        <p14:creationId xmlns:p14="http://schemas.microsoft.com/office/powerpoint/2010/main" val="1321321842"/>
       </p:ext>
     </p:extLst>
   </p:cSld>
@@ -634,7 +660,7 @@
     </p:spTree>
     <p:extLst>
       <p:ext uri="{BB962C8B-B14F-4D97-AF65-F5344CB8AC3E}">
-        <p14:creationId xmlns:p14="http://schemas.microsoft.com/office/powerpoint/2010/main" val="2040622670"/>
+        <p14:creationId xmlns:p14="http://schemas.microsoft.com/office/powerpoint/2010/main" val="1563715086"/>
       </p:ext>
     </p:extLst>
   </p:cSld>
@@ -709,7 +735,7 @@
           <a:p>
             <a:fld id="{370F34BA-E12B-5346-9BF1-0229B93A49BC}" type="slidenum">
               <a:rPr lang="en-US" smtClean="0"/>
-              <a:t>6</a:t>
+              <a:t>4</a:t>
             </a:fld>
             <a:endParaRPr lang="en-US"/>
           </a:p>
@@ -718,7 +744,7 @@
     </p:spTree>
     <p:extLst>
       <p:ext uri="{BB962C8B-B14F-4D97-AF65-F5344CB8AC3E}">
-        <p14:creationId xmlns:p14="http://schemas.microsoft.com/office/powerpoint/2010/main" val="226849039"/>
+        <p14:creationId xmlns:p14="http://schemas.microsoft.com/office/powerpoint/2010/main" val="1394004408"/>
       </p:ext>
     </p:extLst>
   </p:cSld>
@@ -793,7 +819,7 @@
           <a:p>
             <a:fld id="{370F34BA-E12B-5346-9BF1-0229B93A49BC}" type="slidenum">
               <a:rPr lang="en-US" smtClean="0"/>
-              <a:t>8</a:t>
+              <a:t>6</a:t>
             </a:fld>
             <a:endParaRPr lang="en-US"/>
           </a:p>
@@ -802,91 +828,7 @@
     </p:spTree>
     <p:extLst>
       <p:ext uri="{BB962C8B-B14F-4D97-AF65-F5344CB8AC3E}">
-        <p14:creationId xmlns:p14="http://schemas.microsoft.com/office/powerpoint/2010/main" val="2612894747"/>
-      </p:ext>
-    </p:extLst>
-  </p:cSld>
-  <p:clrMapOvr>
-    <a:masterClrMapping/>
-  </p:clrMapOvr>
-</p:notes>
-</file>
-
-<file path=ppt/notesSlides/notesSlide5.xml><?xml version="1.0" encoding="utf-8"?>
-<p:notes xmlns:a="http://schemas.openxmlformats.org/drawingml/2006/main" xmlns:r="http://schemas.openxmlformats.org/officeDocument/2006/relationships" xmlns:p="http://schemas.openxmlformats.org/presentationml/2006/main">
-  <p:cSld>
-    <p:spTree>
-      <p:nvGrpSpPr>
-        <p:cNvPr id="1" name=""/>
-        <p:cNvGrpSpPr/>
-        <p:nvPr/>
-      </p:nvGrpSpPr>
-      <p:grpSpPr>
-        <a:xfrm>
-          <a:off x="0" y="0"/>
-          <a:ext cx="0" cy="0"/>
-          <a:chOff x="0" y="0"/>
-          <a:chExt cx="0" cy="0"/>
-        </a:xfrm>
-      </p:grpSpPr>
-      <p:sp>
-        <p:nvSpPr>
-          <p:cNvPr id="2" name="Slide Image Placeholder 1"/>
-          <p:cNvSpPr>
-            <a:spLocks noGrp="1" noRot="1" noChangeAspect="1"/>
-          </p:cNvSpPr>
-          <p:nvPr>
-            <p:ph type="sldImg"/>
-          </p:nvPr>
-        </p:nvSpPr>
-        <p:spPr/>
-      </p:sp>
-      <p:sp>
-        <p:nvSpPr>
-          <p:cNvPr id="3" name="Notes Placeholder 2"/>
-          <p:cNvSpPr>
-            <a:spLocks noGrp="1"/>
-          </p:cNvSpPr>
-          <p:nvPr>
-            <p:ph type="body" idx="1"/>
-          </p:nvPr>
-        </p:nvSpPr>
-        <p:spPr/>
-        <p:txBody>
-          <a:bodyPr/>
-          <a:lstStyle/>
-          <a:p>
-            <a:endParaRPr lang="en-US" dirty="0"/>
-          </a:p>
-        </p:txBody>
-      </p:sp>
-      <p:sp>
-        <p:nvSpPr>
-          <p:cNvPr id="4" name="Slide Number Placeholder 3"/>
-          <p:cNvSpPr>
-            <a:spLocks noGrp="1"/>
-          </p:cNvSpPr>
-          <p:nvPr>
-            <p:ph type="sldNum" sz="quarter" idx="5"/>
-          </p:nvPr>
-        </p:nvSpPr>
-        <p:spPr/>
-        <p:txBody>
-          <a:bodyPr/>
-          <a:lstStyle/>
-          <a:p>
-            <a:fld id="{370F34BA-E12B-5346-9BF1-0229B93A49BC}" type="slidenum">
-              <a:rPr lang="en-US" smtClean="0"/>
-              <a:t>10</a:t>
-            </a:fld>
-            <a:endParaRPr lang="en-US"/>
-          </a:p>
-        </p:txBody>
-      </p:sp>
-    </p:spTree>
-    <p:extLst>
-      <p:ext uri="{BB962C8B-B14F-4D97-AF65-F5344CB8AC3E}">
-        <p14:creationId xmlns:p14="http://schemas.microsoft.com/office/powerpoint/2010/main" val="610260787"/>
+        <p14:creationId xmlns:p14="http://schemas.microsoft.com/office/powerpoint/2010/main" val="2040622670"/>
       </p:ext>
     </p:extLst>
   </p:cSld>
@@ -4748,7 +4690,7 @@
           <a:p>
             <a:r>
               <a:rPr lang="en-US" sz="2000" dirty="0"/>
-              <a:t>7.04</a:t>
+              <a:t>7.11</a:t>
             </a:r>
           </a:p>
         </p:txBody>
@@ -4819,13 +4761,7 @@
   <p:cSld>
     <p:spTree>
       <p:nvGrpSpPr>
-        <p:cNvPr id="1" name="">
-          <a:extLst>
-            <a:ext uri="{FF2B5EF4-FFF2-40B4-BE49-F238E27FC236}">
-              <a16:creationId xmlns:a16="http://schemas.microsoft.com/office/drawing/2014/main" id="{D1857A6F-4786-35A3-79E5-74BD2A8B2D0C}"/>
-            </a:ext>
-          </a:extLst>
-        </p:cNvPr>
+        <p:cNvPr id="1" name=""/>
         <p:cNvGrpSpPr/>
         <p:nvPr/>
       </p:nvGrpSpPr>
@@ -4842,7 +4778,7 @@
           <p:cNvPr id="2" name="Title 1">
             <a:extLst>
               <a:ext uri="{FF2B5EF4-FFF2-40B4-BE49-F238E27FC236}">
-                <a16:creationId xmlns:a16="http://schemas.microsoft.com/office/drawing/2014/main" id="{211F3C8D-29E0-54D8-F14D-1E5611C8B5D2}"/>
+                <a16:creationId xmlns:a16="http://schemas.microsoft.com/office/drawing/2014/main" id="{19B1A3C8-44BB-B6E8-2CC5-4520D0F19D60}"/>
               </a:ext>
             </a:extLst>
           </p:cNvPr>
@@ -4855,115 +4791,151 @@
         </p:nvSpPr>
         <p:spPr>
           <a:xfrm>
-            <a:off x="309573" y="1282804"/>
+            <a:off x="640079" y="204932"/>
             <a:ext cx="10890929" cy="1097280"/>
           </a:xfrm>
         </p:spPr>
         <p:txBody>
-          <a:bodyPr>
-            <a:normAutofit/>
-          </a:bodyPr>
-          <a:lstStyle/>
-          <a:p>
-            <a:r>
-              <a:rPr lang="en-US" sz="3600" dirty="0"/>
-              <a:t>How to get P, Q, </a:t>
-            </a:r>
-            <a:r>
-              <a:rPr lang="en-US" sz="3600" dirty="0" err="1"/>
-              <a:t>Ω</a:t>
-            </a:r>
-            <a:r>
-              <a:rPr lang="en-US" sz="3600" dirty="0"/>
-              <a:t> with 13F?</a:t>
-            </a:r>
-            <a:endParaRPr lang="en-US" dirty="0"/>
-          </a:p>
-        </p:txBody>
-      </p:sp>
-      <p:sp>
-        <p:nvSpPr>
-          <p:cNvPr id="3" name="Content Placeholder 2">
-            <a:extLst>
-              <a:ext uri="{FF2B5EF4-FFF2-40B4-BE49-F238E27FC236}">
-                <a16:creationId xmlns:a16="http://schemas.microsoft.com/office/drawing/2014/main" id="{B7EEE5FA-E047-7835-130E-872D9FA224C3}"/>
-              </a:ext>
-            </a:extLst>
-          </p:cNvPr>
-          <p:cNvSpPr>
-            <a:spLocks noGrp="1"/>
-          </p:cNvSpPr>
-          <p:nvPr>
-            <p:ph idx="1"/>
-          </p:nvPr>
-        </p:nvSpPr>
-        <p:spPr>
-          <a:xfrm>
-            <a:off x="154776" y="2181780"/>
-            <a:ext cx="6554495" cy="4373256"/>
-          </a:xfrm>
-        </p:spPr>
-        <p:txBody>
-          <a:bodyPr>
-            <a:normAutofit/>
-          </a:bodyPr>
-          <a:lstStyle/>
-          <a:p>
+          <a:bodyPr/>
+          <a:lstStyle/>
+          <a:p>
+            <a:r>
+              <a:rPr lang="en-US" dirty="0"/>
+              <a:t>(5) </a:t>
+            </a:r>
             <a:r>
               <a:rPr lang="en-US" dirty="0">
                 <a:solidFill>
                   <a:srgbClr val="FF0000"/>
                 </a:solidFill>
               </a:rPr>
-              <a:t>P</a:t>
-            </a:r>
-            <a:r>
-              <a:rPr lang="en-US" dirty="0"/>
-              <a:t>: Simply based on the weight of each portfolio</a:t>
-            </a:r>
-          </a:p>
-          <a:p>
-            <a:r>
-              <a:rPr lang="en-US" dirty="0">
-                <a:solidFill>
-                  <a:srgbClr val="FF0000"/>
-                </a:solidFill>
-              </a:rPr>
-              <a:t>Q</a:t>
-            </a:r>
-            <a:r>
-              <a:rPr lang="en-US" dirty="0"/>
-              <a:t>: Apply certain model to predict future holding, then use this prediction to construct this View vector Q</a:t>
-            </a:r>
-          </a:p>
-          <a:p>
-            <a:r>
-              <a:rPr lang="en-US" b="1" dirty="0" err="1">
-                <a:solidFill>
-                  <a:srgbClr val="FF0000"/>
-                </a:solidFill>
-              </a:rPr>
-              <a:t>Ω</a:t>
-            </a:r>
-            <a:r>
-              <a:rPr lang="en-US" dirty="0"/>
-              <a:t>: </a:t>
-            </a:r>
-            <a:r>
-              <a:rPr lang="en-GB" dirty="0"/>
-              <a:t>The more inaccurate a fund's past performance has been, the higher Omega it should be assigned</a:t>
-            </a:r>
-            <a:endParaRPr lang="en-US" dirty="0"/>
-          </a:p>
-        </p:txBody>
-      </p:sp>
-      <p:sp>
-        <p:nvSpPr>
-          <p:cNvPr id="5" name="Rectangle 4">
-            <a:hlinkClick r:id="rId3" action="ppaction://hlinksldjump"/>
-            <a:extLst>
-              <a:ext uri="{FF2B5EF4-FFF2-40B4-BE49-F238E27FC236}">
-                <a16:creationId xmlns:a16="http://schemas.microsoft.com/office/drawing/2014/main" id="{4376B3AC-1FAD-C4DF-26D7-1A62A6BD48AD}"/>
+              <a:t>Calculate P and Omega</a:t>
+            </a:r>
+          </a:p>
+        </p:txBody>
+      </p:sp>
+      <p:sp>
+        <p:nvSpPr>
+          <p:cNvPr id="3" name="Content Placeholder 2">
+            <a:extLst>
+              <a:ext uri="{FF2B5EF4-FFF2-40B4-BE49-F238E27FC236}">
+                <a16:creationId xmlns:a16="http://schemas.microsoft.com/office/drawing/2014/main" id="{F0F0733F-FF4F-10CD-2E3A-51758222C77E}"/>
+              </a:ext>
+            </a:extLst>
+          </p:cNvPr>
+          <p:cNvSpPr>
+            <a:spLocks noGrp="1"/>
+          </p:cNvSpPr>
+          <p:nvPr>
+            <p:ph idx="1"/>
+          </p:nvPr>
+        </p:nvSpPr>
+        <p:spPr/>
+        <p:txBody>
+          <a:bodyPr/>
+          <a:lstStyle/>
+          <a:p>
+            <a:endParaRPr lang="en-US"/>
+          </a:p>
+        </p:txBody>
+      </p:sp>
+      <p:pic>
+        <p:nvPicPr>
+          <p:cNvPr id="4" name="Picture 3">
+            <a:extLst>
+              <a:ext uri="{FF2B5EF4-FFF2-40B4-BE49-F238E27FC236}">
+                <a16:creationId xmlns:a16="http://schemas.microsoft.com/office/drawing/2014/main" id="{A37F5E28-AD2E-1A8B-FFA3-FF13003941AF}"/>
+              </a:ext>
+            </a:extLst>
+          </p:cNvPr>
+          <p:cNvPicPr>
+            <a:picLocks noChangeAspect="1"/>
+          </p:cNvPicPr>
+          <p:nvPr/>
+        </p:nvPicPr>
+        <p:blipFill>
+          <a:blip r:embed="rId2"/>
+          <a:stretch>
+            <a:fillRect/>
+          </a:stretch>
+        </p:blipFill>
+        <p:spPr>
+          <a:xfrm>
+            <a:off x="7552881" y="204932"/>
+            <a:ext cx="4137549" cy="6653068"/>
+          </a:xfrm>
+          <a:prstGeom prst="rect">
+            <a:avLst/>
+          </a:prstGeom>
+        </p:spPr>
+      </p:pic>
+      <p:pic>
+        <p:nvPicPr>
+          <p:cNvPr id="5" name="Picture 4">
+            <a:extLst>
+              <a:ext uri="{FF2B5EF4-FFF2-40B4-BE49-F238E27FC236}">
+                <a16:creationId xmlns:a16="http://schemas.microsoft.com/office/drawing/2014/main" id="{54EEE910-1C6E-3226-EB2F-3049964E82D7}"/>
+              </a:ext>
+            </a:extLst>
+          </p:cNvPr>
+          <p:cNvPicPr>
+            <a:picLocks noChangeAspect="1"/>
+          </p:cNvPicPr>
+          <p:nvPr/>
+        </p:nvPicPr>
+        <p:blipFill>
+          <a:blip r:embed="rId3"/>
+          <a:stretch>
+            <a:fillRect/>
+          </a:stretch>
+        </p:blipFill>
+        <p:spPr>
+          <a:xfrm>
+            <a:off x="761597" y="1241101"/>
+            <a:ext cx="6296229" cy="2187899"/>
+          </a:xfrm>
+          <a:prstGeom prst="rect">
+            <a:avLst/>
+          </a:prstGeom>
+        </p:spPr>
+      </p:pic>
+      <p:pic>
+        <p:nvPicPr>
+          <p:cNvPr id="6" name="Picture 5">
+            <a:extLst>
+              <a:ext uri="{FF2B5EF4-FFF2-40B4-BE49-F238E27FC236}">
+                <a16:creationId xmlns:a16="http://schemas.microsoft.com/office/drawing/2014/main" id="{8A6AFCE8-5F9C-5765-90C1-03B58EECD64A}"/>
+              </a:ext>
+            </a:extLst>
+          </p:cNvPr>
+          <p:cNvPicPr>
+            <a:picLocks noChangeAspect="1"/>
+          </p:cNvPicPr>
+          <p:nvPr/>
+        </p:nvPicPr>
+        <p:blipFill>
+          <a:blip r:embed="rId4"/>
+          <a:stretch>
+            <a:fillRect/>
+          </a:stretch>
+        </p:blipFill>
+        <p:spPr>
+          <a:xfrm>
+            <a:off x="761596" y="3928073"/>
+            <a:ext cx="6296229" cy="2369872"/>
+          </a:xfrm>
+          <a:prstGeom prst="rect">
+            <a:avLst/>
+          </a:prstGeom>
+        </p:spPr>
+      </p:pic>
+      <p:sp>
+        <p:nvSpPr>
+          <p:cNvPr id="7" name="Rectangle 6">
+            <a:hlinkClick r:id="rId5" action="ppaction://hlinksldjump"/>
+            <a:extLst>
+              <a:ext uri="{FF2B5EF4-FFF2-40B4-BE49-F238E27FC236}">
+                <a16:creationId xmlns:a16="http://schemas.microsoft.com/office/drawing/2014/main" id="{AEDAE974-04D8-3076-0C8A-1BFD4FF518EB}"/>
               </a:ext>
             </a:extLst>
           </p:cNvPr>
@@ -4972,8 +4944,8 @@
         </p:nvSpPr>
         <p:spPr>
           <a:xfrm>
-            <a:off x="10028871" y="268831"/>
-            <a:ext cx="1717288" cy="654621"/>
+            <a:off x="10729813" y="2294808"/>
+            <a:ext cx="1296250" cy="503053"/>
           </a:xfrm>
           <a:prstGeom prst="rect">
             <a:avLst/>
@@ -5008,40 +4980,10 @@
           </a:p>
         </p:txBody>
       </p:sp>
-      <p:pic>
-        <p:nvPicPr>
-          <p:cNvPr id="10" name="Picture 9">
-            <a:extLst>
-              <a:ext uri="{FF2B5EF4-FFF2-40B4-BE49-F238E27FC236}">
-                <a16:creationId xmlns:a16="http://schemas.microsoft.com/office/drawing/2014/main" id="{09BA7BCF-008C-6F75-D2B0-8D863AACCB9D}"/>
-              </a:ext>
-            </a:extLst>
-          </p:cNvPr>
-          <p:cNvPicPr>
-            <a:picLocks noChangeAspect="1"/>
-          </p:cNvPicPr>
-          <p:nvPr/>
-        </p:nvPicPr>
-        <p:blipFill>
-          <a:blip r:embed="rId4"/>
-          <a:stretch>
-            <a:fillRect/>
-          </a:stretch>
-        </p:blipFill>
-        <p:spPr>
-          <a:xfrm>
-            <a:off x="6629400" y="1043236"/>
-            <a:ext cx="5562600" cy="5511800"/>
-          </a:xfrm>
-          <a:prstGeom prst="rect">
-            <a:avLst/>
-          </a:prstGeom>
-        </p:spPr>
-      </p:pic>
     </p:spTree>
     <p:extLst>
       <p:ext uri="{BB962C8B-B14F-4D97-AF65-F5344CB8AC3E}">
-        <p14:creationId xmlns:p14="http://schemas.microsoft.com/office/powerpoint/2010/main" val="743153270"/>
+        <p14:creationId xmlns:p14="http://schemas.microsoft.com/office/powerpoint/2010/main" val="4136275028"/>
       </p:ext>
     </p:extLst>
   </p:cSld>
@@ -5126,230 +5068,31 @@
         </p:spPr>
         <p:txBody>
           <a:bodyPr>
-            <a:normAutofit lnSpcReduction="10000"/>
+            <a:normAutofit/>
           </a:bodyPr>
           <a:lstStyle/>
           <a:p>
-            <a:r>
-              <a:rPr lang="en-US" dirty="0"/>
-              <a:t>Question</a:t>
-            </a:r>
-            <a:r>
-              <a:rPr lang="en-US" altLang="zh-CN" dirty="0"/>
-              <a:t>1:</a:t>
-            </a:r>
+            <a:pPr marL="0" indent="0">
+              <a:buNone/>
+            </a:pPr>
             <a:r>
               <a:rPr lang="zh-CN" altLang="en-US" dirty="0"/>
               <a:t> </a:t>
             </a:r>
-            <a:r>
-              <a:rPr lang="en-US" altLang="zh-CN" dirty="0"/>
-              <a:t>Is this structure solid?</a:t>
-            </a:r>
             <a:endParaRPr lang="en-GB" altLang="zh-CN" dirty="0"/>
           </a:p>
           <a:p>
-            <a:r>
-              <a:rPr lang="en-US" altLang="zh-CN" dirty="0"/>
-              <a:t>Question2:</a:t>
-            </a:r>
-            <a:r>
-              <a:rPr lang="zh-CN" altLang="en-US" dirty="0"/>
-              <a:t> </a:t>
-            </a:r>
-            <a:r>
-              <a:rPr lang="en-US" altLang="zh-CN" dirty="0"/>
-              <a:t>My Next step:</a:t>
-            </a:r>
-          </a:p>
-          <a:p>
             <a:pPr lvl="1"/>
-            <a:r>
-              <a:rPr lang="en-US" altLang="zh-CN" dirty="0"/>
-              <a:t>Write Empirical Analysis</a:t>
-            </a:r>
-          </a:p>
-          <a:p>
-            <a:pPr lvl="2"/>
-            <a:r>
-              <a:rPr lang="en-US" altLang="zh-CN" dirty="0"/>
-              <a:t>Enhance Likelihood (Investor View </a:t>
-            </a:r>
-            <a:r>
-              <a:rPr lang="en-US" altLang="zh-CN" b="1" dirty="0">
-                <a:solidFill>
-                  <a:srgbClr val="FF0000"/>
-                </a:solidFill>
-              </a:rPr>
-              <a:t>Q</a:t>
-            </a:r>
-            <a:r>
-              <a:rPr lang="en-US" altLang="zh-CN" dirty="0"/>
-              <a:t>)</a:t>
-            </a:r>
-          </a:p>
-          <a:p>
-            <a:pPr lvl="3"/>
-            <a:r>
-              <a:rPr lang="en-US" altLang="zh-CN" dirty="0"/>
-              <a:t>Benchmark: </a:t>
-            </a:r>
-            <a:r>
-              <a:rPr lang="en-US" altLang="zh-CN" dirty="0" err="1"/>
-              <a:t>TabPFN</a:t>
-            </a:r>
             <a:endParaRPr lang="en-US" altLang="zh-CN" dirty="0"/>
-          </a:p>
-          <a:p>
-            <a:pPr lvl="4"/>
-            <a:r>
-              <a:rPr lang="en-US" altLang="zh-CN" dirty="0"/>
-              <a:t>Input: Macro + 13 F</a:t>
-            </a:r>
-          </a:p>
-          <a:p>
-            <a:pPr lvl="4"/>
-            <a:r>
-              <a:rPr lang="en-US" altLang="zh-CN" dirty="0"/>
-              <a:t>Output: Predicted Future Asset </a:t>
-            </a:r>
-            <a:r>
-              <a:rPr lang="en-US" altLang="zh-CN" dirty="0" err="1"/>
-              <a:t>HoldingFuture</a:t>
-            </a:r>
-            <a:r>
-              <a:rPr lang="en-US" altLang="zh-CN" dirty="0"/>
-              <a:t> Holding</a:t>
-            </a:r>
-          </a:p>
-          <a:p>
-            <a:pPr lvl="3"/>
-            <a:r>
-              <a:rPr lang="en-US" altLang="zh-CN" dirty="0"/>
-              <a:t>Other model/methods: GAN, Transformer, Bayesian </a:t>
-            </a:r>
-            <a:r>
-              <a:rPr lang="en-US" altLang="zh-CN" dirty="0" err="1"/>
-              <a:t>emsemble</a:t>
-            </a:r>
-            <a:r>
-              <a:rPr lang="en-US" altLang="zh-CN" dirty="0"/>
-              <a:t> models</a:t>
-            </a:r>
-          </a:p>
-          <a:p>
-            <a:pPr lvl="2"/>
-            <a:r>
-              <a:rPr lang="en-US" altLang="zh-CN" dirty="0"/>
-              <a:t>Enhance Prior (Expected Market Return </a:t>
-            </a:r>
-            <a:r>
-              <a:rPr lang="en-US" altLang="zh-CN" b="1" dirty="0">
-                <a:solidFill>
-                  <a:srgbClr val="FF0000"/>
-                </a:solidFill>
-              </a:rPr>
-              <a:t>E[R]</a:t>
-            </a:r>
-            <a:r>
-              <a:rPr lang="en-US" altLang="zh-CN" dirty="0"/>
-              <a:t>)</a:t>
-            </a:r>
-          </a:p>
-          <a:p>
-            <a:pPr lvl="3"/>
-            <a:r>
-              <a:rPr lang="en-US" altLang="zh-CN" dirty="0"/>
-              <a:t>Benchmark: </a:t>
-            </a:r>
-            <a:r>
-              <a:rPr lang="en-US" altLang="zh-CN" dirty="0" err="1"/>
-              <a:t>TabPFN</a:t>
-            </a:r>
-            <a:r>
-              <a:rPr lang="en-US" altLang="zh-CN" dirty="0"/>
-              <a:t> </a:t>
-            </a:r>
-          </a:p>
-          <a:p>
-            <a:pPr lvl="4"/>
-            <a:r>
-              <a:rPr lang="en-US" altLang="zh-CN" dirty="0"/>
-              <a:t>Input: Macro + Fundamental</a:t>
-            </a:r>
-          </a:p>
-          <a:p>
-            <a:pPr lvl="4"/>
-            <a:r>
-              <a:rPr lang="en-US" altLang="zh-CN" dirty="0"/>
-              <a:t>Output: Expected return metrics</a:t>
-            </a:r>
-          </a:p>
-          <a:p>
-            <a:pPr lvl="3"/>
-            <a:r>
-              <a:rPr lang="en-US" altLang="zh-CN" dirty="0"/>
-              <a:t>Other model/methods: ??? </a:t>
-            </a:r>
-          </a:p>
-        </p:txBody>
-      </p:sp>
-      <p:sp>
-        <p:nvSpPr>
-          <p:cNvPr id="4" name="Rectangle 3">
-            <a:hlinkClick r:id="rId2" action="ppaction://hlinksldjump"/>
-            <a:extLst>
-              <a:ext uri="{FF2B5EF4-FFF2-40B4-BE49-F238E27FC236}">
-                <a16:creationId xmlns:a16="http://schemas.microsoft.com/office/drawing/2014/main" id="{045F5B78-F4BB-DBC5-DC48-A6E3ACA175EC}"/>
-              </a:ext>
-            </a:extLst>
-          </p:cNvPr>
-          <p:cNvSpPr/>
-          <p:nvPr/>
-        </p:nvSpPr>
-        <p:spPr>
-          <a:xfrm>
-            <a:off x="9382230" y="799778"/>
-            <a:ext cx="2004291" cy="489527"/>
-          </a:xfrm>
-          <a:prstGeom prst="rect">
-            <a:avLst/>
-          </a:prstGeom>
-        </p:spPr>
-        <p:style>
-          <a:lnRef idx="2">
-            <a:schemeClr val="accent1">
-              <a:shade val="15000"/>
-            </a:schemeClr>
-          </a:lnRef>
-          <a:fillRef idx="1">
-            <a:schemeClr val="accent1"/>
-          </a:fillRef>
-          <a:effectRef idx="0">
-            <a:schemeClr val="accent1"/>
-          </a:effectRef>
-          <a:fontRef idx="minor">
-            <a:schemeClr val="lt1"/>
-          </a:fontRef>
-        </p:style>
-        <p:txBody>
-          <a:bodyPr rtlCol="0" anchor="ctr"/>
-          <a:lstStyle/>
-          <a:p>
-            <a:pPr algn="ctr"/>
-            <a:r>
-              <a:rPr lang="en-US" dirty="0"/>
-              <a:t>Return</a:t>
-            </a:r>
           </a:p>
         </p:txBody>
       </p:sp>
       <p:pic>
         <p:nvPicPr>
-          <p:cNvPr id="7" name="Picture 6">
-            <a:extLst>
-              <a:ext uri="{FF2B5EF4-FFF2-40B4-BE49-F238E27FC236}">
-                <a16:creationId xmlns:a16="http://schemas.microsoft.com/office/drawing/2014/main" id="{D1DD228D-B54E-EC67-DC43-BA94E73339B2}"/>
+          <p:cNvPr id="5" name="Picture 4">
+            <a:extLst>
+              <a:ext uri="{FF2B5EF4-FFF2-40B4-BE49-F238E27FC236}">
+                <a16:creationId xmlns:a16="http://schemas.microsoft.com/office/drawing/2014/main" id="{A88E28DC-58D5-791F-A978-3A8F78C35DC6}"/>
               </a:ext>
             </a:extLst>
           </p:cNvPr>
@@ -5359,15 +5102,15 @@
           <p:nvPr/>
         </p:nvPicPr>
         <p:blipFill>
-          <a:blip r:embed="rId3"/>
+          <a:blip r:embed="rId2"/>
           <a:stretch>
             <a:fillRect/>
           </a:stretch>
         </p:blipFill>
         <p:spPr>
           <a:xfrm>
-            <a:off x="7088119" y="1779155"/>
-            <a:ext cx="4876800" cy="4775200"/>
+            <a:off x="7139160" y="754594"/>
+            <a:ext cx="4985455" cy="6103406"/>
           </a:xfrm>
           <a:prstGeom prst="rect">
             <a:avLst/>
@@ -5409,6 +5152,383 @@
           <p:cNvPr id="2" name="Title 1">
             <a:extLst>
               <a:ext uri="{FF2B5EF4-FFF2-40B4-BE49-F238E27FC236}">
+                <a16:creationId xmlns:a16="http://schemas.microsoft.com/office/drawing/2014/main" id="{56AE86D6-E24E-A7B0-6704-312FAE0627EC}"/>
+              </a:ext>
+            </a:extLst>
+          </p:cNvPr>
+          <p:cNvSpPr>
+            <a:spLocks noGrp="1"/>
+          </p:cNvSpPr>
+          <p:nvPr>
+            <p:ph type="title"/>
+          </p:nvPr>
+        </p:nvSpPr>
+        <p:spPr/>
+        <p:txBody>
+          <a:bodyPr/>
+          <a:lstStyle/>
+          <a:p>
+            <a:r>
+              <a:rPr lang="en-US" dirty="0"/>
+              <a:t>My Next Step:</a:t>
+            </a:r>
+          </a:p>
+        </p:txBody>
+      </p:sp>
+      <p:sp>
+        <p:nvSpPr>
+          <p:cNvPr id="3" name="Content Placeholder 2">
+            <a:extLst>
+              <a:ext uri="{FF2B5EF4-FFF2-40B4-BE49-F238E27FC236}">
+                <a16:creationId xmlns:a16="http://schemas.microsoft.com/office/drawing/2014/main" id="{9C85D083-2B60-8A77-E6B6-69D8EFA517D0}"/>
+              </a:ext>
+            </a:extLst>
+          </p:cNvPr>
+          <p:cNvSpPr>
+            <a:spLocks noGrp="1"/>
+          </p:cNvSpPr>
+          <p:nvPr>
+            <p:ph idx="1"/>
+          </p:nvPr>
+        </p:nvSpPr>
+        <p:spPr/>
+        <p:txBody>
+          <a:bodyPr>
+            <a:normAutofit/>
+          </a:bodyPr>
+          <a:lstStyle/>
+          <a:p>
+            <a:r>
+              <a:rPr lang="en-US" altLang="zh-CN" dirty="0"/>
+              <a:t>(1) Finish model pipeline</a:t>
+            </a:r>
+          </a:p>
+          <a:p>
+            <a:pPr lvl="1"/>
+            <a:r>
+              <a:rPr lang="en-US" altLang="zh-CN" dirty="0"/>
+              <a:t>Finish the pipeline for getting </a:t>
+            </a:r>
+            <a:r>
+              <a:rPr lang="en-US" altLang="zh-CN" b="1" dirty="0">
+                <a:solidFill>
+                  <a:srgbClr val="FF0000"/>
+                </a:solidFill>
+              </a:rPr>
+              <a:t>Q</a:t>
+            </a:r>
+            <a:endParaRPr lang="en-US" altLang="zh-CN" dirty="0"/>
+          </a:p>
+          <a:p>
+            <a:pPr lvl="1"/>
+            <a:r>
+              <a:rPr lang="en-US" altLang="zh-CN" dirty="0"/>
+              <a:t>Build out the pipeline for getting Prior </a:t>
+            </a:r>
+            <a:r>
+              <a:rPr lang="en-US" altLang="zh-CN" b="1" dirty="0">
+                <a:solidFill>
+                  <a:srgbClr val="FF0000"/>
+                </a:solidFill>
+              </a:rPr>
+              <a:t>E[R]</a:t>
+            </a:r>
+          </a:p>
+          <a:p>
+            <a:r>
+              <a:rPr lang="en-US" altLang="zh-CN" dirty="0"/>
+              <a:t>(2) Perform more Literature review</a:t>
+            </a:r>
+          </a:p>
+          <a:p>
+            <a:pPr lvl="2"/>
+            <a:r>
+              <a:rPr lang="en-US" altLang="zh-CN" dirty="0"/>
+              <a:t>How to deal with 13 F Dataset? (Get </a:t>
+            </a:r>
+            <a:r>
+              <a:rPr lang="en-US" altLang="zh-CN" b="1" dirty="0">
+                <a:solidFill>
+                  <a:srgbClr val="FF0000"/>
+                </a:solidFill>
+              </a:rPr>
+              <a:t>P</a:t>
+            </a:r>
+            <a:r>
+              <a:rPr lang="en-US" altLang="zh-CN" dirty="0"/>
+              <a:t> and </a:t>
+            </a:r>
+            <a:r>
+              <a:rPr lang="en-US" altLang="zh-CN" b="1" dirty="0">
+                <a:solidFill>
+                  <a:srgbClr val="FF0000"/>
+                </a:solidFill>
+              </a:rPr>
+              <a:t>Omega</a:t>
+            </a:r>
+            <a:r>
+              <a:rPr lang="en-US" altLang="zh-CN" dirty="0"/>
+              <a:t>)</a:t>
+            </a:r>
+          </a:p>
+          <a:p>
+            <a:pPr lvl="3"/>
+            <a:r>
+              <a:rPr lang="en-US" altLang="zh-CN" dirty="0"/>
+              <a:t>Quarterly data, update slow</a:t>
+            </a:r>
+          </a:p>
+          <a:p>
+            <a:pPr lvl="2"/>
+            <a:r>
+              <a:rPr lang="en-US" altLang="zh-CN" dirty="0"/>
+              <a:t>What models are used to get </a:t>
+            </a:r>
+            <a:r>
+              <a:rPr lang="en-US" altLang="zh-CN" b="1" dirty="0">
+                <a:solidFill>
+                  <a:srgbClr val="FF0000"/>
+                </a:solidFill>
+              </a:rPr>
+              <a:t>Q</a:t>
+            </a:r>
+            <a:r>
+              <a:rPr lang="en-US" altLang="zh-CN" dirty="0"/>
+              <a:t> in the past?</a:t>
+            </a:r>
+          </a:p>
+          <a:p>
+            <a:pPr lvl="2"/>
+            <a:r>
+              <a:rPr lang="en-US" altLang="zh-CN" dirty="0"/>
+              <a:t>What models are used to get Prior </a:t>
+            </a:r>
+            <a:r>
+              <a:rPr lang="en-US" altLang="zh-CN" b="1" dirty="0">
+                <a:solidFill>
+                  <a:srgbClr val="FF0000"/>
+                </a:solidFill>
+              </a:rPr>
+              <a:t>E[R]</a:t>
+            </a:r>
+            <a:endParaRPr lang="en-US" altLang="zh-CN" dirty="0"/>
+          </a:p>
+        </p:txBody>
+      </p:sp>
+      <p:sp>
+        <p:nvSpPr>
+          <p:cNvPr id="4" name="Rectangle 3">
+            <a:hlinkClick r:id="rId2" action="ppaction://hlinksldjump"/>
+            <a:extLst>
+              <a:ext uri="{FF2B5EF4-FFF2-40B4-BE49-F238E27FC236}">
+                <a16:creationId xmlns:a16="http://schemas.microsoft.com/office/drawing/2014/main" id="{18CDD0D7-537C-85F9-5462-259DA2D8B50F}"/>
+              </a:ext>
+            </a:extLst>
+          </p:cNvPr>
+          <p:cNvSpPr/>
+          <p:nvPr/>
+        </p:nvSpPr>
+        <p:spPr>
+          <a:xfrm>
+            <a:off x="9382230" y="171573"/>
+            <a:ext cx="2004291" cy="489527"/>
+          </a:xfrm>
+          <a:prstGeom prst="rect">
+            <a:avLst/>
+          </a:prstGeom>
+        </p:spPr>
+        <p:style>
+          <a:lnRef idx="2">
+            <a:schemeClr val="accent1">
+              <a:shade val="15000"/>
+            </a:schemeClr>
+          </a:lnRef>
+          <a:fillRef idx="1">
+            <a:schemeClr val="accent1"/>
+          </a:fillRef>
+          <a:effectRef idx="0">
+            <a:schemeClr val="accent1"/>
+          </a:effectRef>
+          <a:fontRef idx="minor">
+            <a:schemeClr val="lt1"/>
+          </a:fontRef>
+        </p:style>
+        <p:txBody>
+          <a:bodyPr rtlCol="0" anchor="ctr"/>
+          <a:lstStyle/>
+          <a:p>
+            <a:pPr algn="ctr"/>
+            <a:r>
+              <a:rPr lang="en-US" dirty="0"/>
+              <a:t>Return</a:t>
+            </a:r>
+          </a:p>
+        </p:txBody>
+      </p:sp>
+    </p:spTree>
+    <p:extLst>
+      <p:ext uri="{BB962C8B-B14F-4D97-AF65-F5344CB8AC3E}">
+        <p14:creationId xmlns:p14="http://schemas.microsoft.com/office/powerpoint/2010/main" val="497228519"/>
+      </p:ext>
+    </p:extLst>
+  </p:cSld>
+  <p:clrMapOvr>
+    <a:masterClrMapping/>
+  </p:clrMapOvr>
+</p:sld>
+</file>
+
+<file path=ppt/slides/slide13.xml><?xml version="1.0" encoding="utf-8"?>
+<p:sld xmlns:a="http://schemas.openxmlformats.org/drawingml/2006/main" xmlns:r="http://schemas.openxmlformats.org/officeDocument/2006/relationships" xmlns:p="http://schemas.openxmlformats.org/presentationml/2006/main">
+  <p:cSld>
+    <p:spTree>
+      <p:nvGrpSpPr>
+        <p:cNvPr id="1" name=""/>
+        <p:cNvGrpSpPr/>
+        <p:nvPr/>
+      </p:nvGrpSpPr>
+      <p:grpSpPr>
+        <a:xfrm>
+          <a:off x="0" y="0"/>
+          <a:ext cx="0" cy="0"/>
+          <a:chOff x="0" y="0"/>
+          <a:chExt cx="0" cy="0"/>
+        </a:xfrm>
+      </p:grpSpPr>
+      <p:sp>
+        <p:nvSpPr>
+          <p:cNvPr id="2" name="Title 1">
+            <a:extLst>
+              <a:ext uri="{FF2B5EF4-FFF2-40B4-BE49-F238E27FC236}">
+                <a16:creationId xmlns:a16="http://schemas.microsoft.com/office/drawing/2014/main" id="{E034D412-5558-37F8-9890-8D708401F58A}"/>
+              </a:ext>
+            </a:extLst>
+          </p:cNvPr>
+          <p:cNvSpPr>
+            <a:spLocks noGrp="1"/>
+          </p:cNvSpPr>
+          <p:nvPr>
+            <p:ph type="title"/>
+          </p:nvPr>
+        </p:nvSpPr>
+        <p:spPr/>
+        <p:txBody>
+          <a:bodyPr/>
+          <a:lstStyle/>
+          <a:p>
+            <a:r>
+              <a:rPr lang="en-US" dirty="0"/>
+              <a:t>My Question</a:t>
+            </a:r>
+          </a:p>
+        </p:txBody>
+      </p:sp>
+      <p:sp>
+        <p:nvSpPr>
+          <p:cNvPr id="3" name="Content Placeholder 2">
+            <a:extLst>
+              <a:ext uri="{FF2B5EF4-FFF2-40B4-BE49-F238E27FC236}">
+                <a16:creationId xmlns:a16="http://schemas.microsoft.com/office/drawing/2014/main" id="{BBE34105-C116-1D54-7C5E-4795DEDF06EE}"/>
+              </a:ext>
+            </a:extLst>
+          </p:cNvPr>
+          <p:cNvSpPr>
+            <a:spLocks noGrp="1"/>
+          </p:cNvSpPr>
+          <p:nvPr>
+            <p:ph idx="1"/>
+          </p:nvPr>
+        </p:nvSpPr>
+        <p:spPr/>
+        <p:txBody>
+          <a:bodyPr/>
+          <a:lstStyle/>
+          <a:p>
+            <a:pPr marL="0" indent="0">
+              <a:buNone/>
+            </a:pPr>
+            <a:endParaRPr lang="en-US" altLang="zh-CN" dirty="0"/>
+          </a:p>
+          <a:p>
+            <a:r>
+              <a:rPr lang="en-US" altLang="zh-CN" dirty="0"/>
+              <a:t>Is my current working methodology correct?</a:t>
+            </a:r>
+          </a:p>
+          <a:p>
+            <a:r>
+              <a:rPr lang="en-US" altLang="zh-CN" dirty="0"/>
+              <a:t>What’s a typical research cycle for a statistician?</a:t>
+            </a:r>
+          </a:p>
+          <a:p>
+            <a:pPr lvl="1"/>
+            <a:r>
+              <a:rPr lang="en-US" altLang="zh-CN" dirty="0"/>
+              <a:t>1 h Literature review</a:t>
+            </a:r>
+          </a:p>
+          <a:p>
+            <a:pPr lvl="1"/>
+            <a:r>
+              <a:rPr lang="en-US" altLang="zh-CN" dirty="0"/>
+              <a:t>1 h coding</a:t>
+            </a:r>
+          </a:p>
+          <a:p>
+            <a:pPr lvl="1"/>
+            <a:r>
+              <a:rPr lang="en-US" altLang="zh-CN" dirty="0"/>
+              <a:t>1 h writing </a:t>
+            </a:r>
+          </a:p>
+          <a:p>
+            <a:pPr lvl="1"/>
+            <a:r>
+              <a:rPr lang="en-US" altLang="zh-CN" dirty="0"/>
+              <a:t>1 h presentation</a:t>
+            </a:r>
+          </a:p>
+          <a:p>
+            <a:endParaRPr lang="en-US" dirty="0"/>
+          </a:p>
+        </p:txBody>
+      </p:sp>
+    </p:spTree>
+    <p:extLst>
+      <p:ext uri="{BB962C8B-B14F-4D97-AF65-F5344CB8AC3E}">
+        <p14:creationId xmlns:p14="http://schemas.microsoft.com/office/powerpoint/2010/main" val="2720583830"/>
+      </p:ext>
+    </p:extLst>
+  </p:cSld>
+  <p:clrMapOvr>
+    <a:masterClrMapping/>
+  </p:clrMapOvr>
+</p:sld>
+</file>
+
+<file path=ppt/slides/slide14.xml><?xml version="1.0" encoding="utf-8"?>
+<p:sld xmlns:a="http://schemas.openxmlformats.org/drawingml/2006/main" xmlns:r="http://schemas.openxmlformats.org/officeDocument/2006/relationships" xmlns:p="http://schemas.openxmlformats.org/presentationml/2006/main">
+  <p:cSld>
+    <p:spTree>
+      <p:nvGrpSpPr>
+        <p:cNvPr id="1" name=""/>
+        <p:cNvGrpSpPr/>
+        <p:nvPr/>
+      </p:nvGrpSpPr>
+      <p:grpSpPr>
+        <a:xfrm>
+          <a:off x="0" y="0"/>
+          <a:ext cx="0" cy="0"/>
+          <a:chOff x="0" y="0"/>
+          <a:chExt cx="0" cy="0"/>
+        </a:xfrm>
+      </p:grpSpPr>
+      <p:sp>
+        <p:nvSpPr>
+          <p:cNvPr id="2" name="Title 1">
+            <a:extLst>
+              <a:ext uri="{FF2B5EF4-FFF2-40B4-BE49-F238E27FC236}">
                 <a16:creationId xmlns:a16="http://schemas.microsoft.com/office/drawing/2014/main" id="{E477AADB-897B-22B7-23E7-132FC5FD73C5}"/>
               </a:ext>
             </a:extLst>
@@ -5472,14 +5592,14 @@
           <p:nvPr>
             <p:extLst>
               <p:ext uri="{D42A27DB-BD31-4B8C-83A1-F6EECF244321}">
-                <p14:modId xmlns:p14="http://schemas.microsoft.com/office/powerpoint/2010/main" val="2422132888"/>
+                <p14:modId xmlns:p14="http://schemas.microsoft.com/office/powerpoint/2010/main" val="669711007"/>
               </p:ext>
             </p:extLst>
           </p:nvPr>
         </p:nvGraphicFramePr>
         <p:xfrm>
           <a:off x="660992" y="2109364"/>
-          <a:ext cx="10870017" cy="4206237"/>
+          <a:ext cx="10870017" cy="4336866"/>
         </p:xfrm>
         <a:graphic>
           <a:graphicData uri="http://schemas.openxmlformats.org/drawingml/2006/table">
@@ -5587,14 +5707,6 @@
                     <a:bodyPr/>
                     <a:lstStyle/>
                     <a:p>
-                      <a:r>
-                        <a:rPr lang="en-US" dirty="0"/>
-                        <a:t>Today</a:t>
-                      </a:r>
-                      <a:r>
-                        <a:rPr lang="zh-CN" altLang="en-US" dirty="0"/>
-                        <a:t> </a:t>
-                      </a:r>
                       <a:endParaRPr lang="en-US" dirty="0"/>
                     </a:p>
                   </a:txBody>
@@ -5628,7 +5740,14 @@
                     <a:p>
                       <a:r>
                         <a:rPr lang="en-US" dirty="0"/>
-                        <a:t>Model Development</a:t>
+                        <a:t>Model Development Part1: </a:t>
+                      </a:r>
+                      <a:br>
+                        <a:rPr lang="en-US" dirty="0"/>
+                      </a:br>
+                      <a:r>
+                        <a:rPr lang="en-US" dirty="0"/>
+                        <a:t>Enhance Likelihood PQR</a:t>
                       </a:r>
                     </a:p>
                   </a:txBody>
@@ -5639,7 +5758,10 @@
                     <a:bodyPr/>
                     <a:lstStyle/>
                     <a:p>
-                      <a:endParaRPr lang="en-US" dirty="0"/>
+                      <a:r>
+                        <a:rPr lang="en-US" dirty="0"/>
+                        <a:t>Today, in progress</a:t>
+                      </a:r>
                     </a:p>
                   </a:txBody>
                   <a:tcPr/>
@@ -6022,7 +6144,13 @@
   <p:cSld>
     <p:spTree>
       <p:nvGrpSpPr>
-        <p:cNvPr id="1" name=""/>
+        <p:cNvPr id="1" name="">
+          <a:extLst>
+            <a:ext uri="{FF2B5EF4-FFF2-40B4-BE49-F238E27FC236}">
+              <a16:creationId xmlns:a16="http://schemas.microsoft.com/office/drawing/2014/main" id="{A5034EA0-D8DF-E526-120E-9E57709DE43B}"/>
+            </a:ext>
+          </a:extLst>
+        </p:cNvPr>
         <p:cNvGrpSpPr/>
         <p:nvPr/>
       </p:nvGrpSpPr>
@@ -6039,7 +6167,7 @@
           <p:cNvPr id="2" name="Title 1">
             <a:extLst>
               <a:ext uri="{FF2B5EF4-FFF2-40B4-BE49-F238E27FC236}">
-                <a16:creationId xmlns:a16="http://schemas.microsoft.com/office/drawing/2014/main" id="{83CFF689-C0EA-F49A-5289-ED350C849154}"/>
+                <a16:creationId xmlns:a16="http://schemas.microsoft.com/office/drawing/2014/main" id="{9E0DC4E9-7C5F-321F-5F2C-598138984B01}"/>
               </a:ext>
             </a:extLst>
           </p:cNvPr>
@@ -6050,145 +6178,174 @@
             <p:ph type="title"/>
           </p:nvPr>
         </p:nvSpPr>
-        <p:spPr/>
-        <p:txBody>
-          <a:bodyPr/>
-          <a:lstStyle/>
-          <a:p>
+        <p:spPr>
+          <a:xfrm>
+            <a:off x="229019" y="1363614"/>
+            <a:ext cx="10890929" cy="1097280"/>
+          </a:xfrm>
+        </p:spPr>
+        <p:txBody>
+          <a:bodyPr>
+            <a:normAutofit fontScale="90000"/>
+          </a:bodyPr>
+          <a:lstStyle/>
+          <a:p>
+            <a:r>
+              <a:rPr lang="en-US" sz="3600" dirty="0"/>
+              <a:t>Quick Recap:</a:t>
+            </a:r>
+            <a:br>
+              <a:rPr lang="en-US" sz="3600" dirty="0"/>
+            </a:br>
+            <a:r>
+              <a:rPr lang="en-US" sz="3600" dirty="0"/>
+              <a:t>How to get P, Q, </a:t>
+            </a:r>
+            <a:r>
+              <a:rPr lang="en-US" sz="3600" dirty="0" err="1"/>
+              <a:t>Ω</a:t>
+            </a:r>
+            <a:r>
+              <a:rPr lang="en-US" sz="3600" dirty="0"/>
+              <a:t> with 13F?</a:t>
+            </a:r>
+            <a:endParaRPr lang="en-US" dirty="0"/>
+          </a:p>
+        </p:txBody>
+      </p:sp>
+      <p:sp>
+        <p:nvSpPr>
+          <p:cNvPr id="3" name="Content Placeholder 2">
+            <a:extLst>
+              <a:ext uri="{FF2B5EF4-FFF2-40B4-BE49-F238E27FC236}">
+                <a16:creationId xmlns:a16="http://schemas.microsoft.com/office/drawing/2014/main" id="{EBA55A73-FBCB-F843-8ED1-767B012912E2}"/>
+              </a:ext>
+            </a:extLst>
+          </p:cNvPr>
+          <p:cNvSpPr>
+            <a:spLocks noGrp="1"/>
+          </p:cNvSpPr>
+          <p:nvPr>
+            <p:ph idx="1"/>
+          </p:nvPr>
+        </p:nvSpPr>
+        <p:spPr>
+          <a:xfrm>
+            <a:off x="229019" y="2768460"/>
+            <a:ext cx="6554495" cy="4373256"/>
+          </a:xfrm>
+        </p:spPr>
+        <p:txBody>
+          <a:bodyPr>
+            <a:normAutofit/>
+          </a:bodyPr>
+          <a:lstStyle/>
+          <a:p>
+            <a:r>
+              <a:rPr lang="en-US" dirty="0">
+                <a:solidFill>
+                  <a:srgbClr val="FF0000"/>
+                </a:solidFill>
+              </a:rPr>
+              <a:t>P</a:t>
+            </a:r>
             <a:r>
               <a:rPr lang="en-US" dirty="0"/>
-              <a:t>Table of Content</a:t>
-            </a:r>
-          </a:p>
-        </p:txBody>
-      </p:sp>
-      <p:sp>
-        <p:nvSpPr>
-          <p:cNvPr id="3" name="Content Placeholder 2">
-            <a:extLst>
-              <a:ext uri="{FF2B5EF4-FFF2-40B4-BE49-F238E27FC236}">
-                <a16:creationId xmlns:a16="http://schemas.microsoft.com/office/drawing/2014/main" id="{1F1B0E3E-3269-F4B1-4B4D-3C3F5E3C4B58}"/>
-              </a:ext>
-            </a:extLst>
-          </p:cNvPr>
-          <p:cNvSpPr>
-            <a:spLocks noGrp="1"/>
-          </p:cNvSpPr>
-          <p:nvPr>
-            <p:ph idx="1"/>
-          </p:nvPr>
-        </p:nvSpPr>
-        <p:spPr/>
-        <p:txBody>
-          <a:bodyPr>
-            <a:normAutofit fontScale="92500" lnSpcReduction="20000"/>
-          </a:bodyPr>
-          <a:lstStyle/>
+              <a:t>: Simply based on the weight of each portfolio</a:t>
+            </a:r>
+          </a:p>
           <a:p>
             <a:r>
               <a:rPr lang="en-US" dirty="0">
-                <a:hlinkClick r:id="rId3" action="ppaction://hlinksldjump"/>
+                <a:solidFill>
+                  <a:srgbClr val="FF0000"/>
+                </a:solidFill>
               </a:rPr>
-              <a:t>Portfolio Selection</a:t>
+              <a:t>Q</a:t>
+            </a:r>
+            <a:r>
+              <a:rPr lang="en-US" dirty="0"/>
+              <a:t>: Apply certain model to predict future holding, then use this prediction to construct this View vector Q</a:t>
+            </a:r>
+          </a:p>
+          <a:p>
+            <a:r>
+              <a:rPr lang="en-US" b="1" dirty="0" err="1">
+                <a:solidFill>
+                  <a:srgbClr val="FF0000"/>
+                </a:solidFill>
+              </a:rPr>
+              <a:t>Ω</a:t>
+            </a:r>
+            <a:r>
+              <a:rPr lang="en-US" dirty="0"/>
+              <a:t>: </a:t>
+            </a:r>
+            <a:r>
+              <a:rPr lang="en-GB" dirty="0"/>
+              <a:t>The more inaccurate a fund's past performance has been, the higher Omega it should be assigned</a:t>
             </a:r>
             <a:endParaRPr lang="en-US" dirty="0"/>
           </a:p>
-          <a:p>
-            <a:r>
-              <a:rPr lang="en-US" dirty="0"/>
-              <a:t>Data Cleaning</a:t>
-            </a:r>
-          </a:p>
-          <a:p>
-            <a:pPr lvl="1"/>
-            <a:r>
-              <a:rPr lang="en-US" dirty="0">
-                <a:hlinkClick r:id="rId4" action="ppaction://hlinksldjump"/>
-              </a:rPr>
-              <a:t>Macro</a:t>
-            </a:r>
-            <a:r>
-              <a:rPr lang="en-US" dirty="0"/>
-              <a:t> - Quarterly</a:t>
-            </a:r>
-          </a:p>
-          <a:p>
-            <a:pPr lvl="1"/>
-            <a:r>
-              <a:rPr lang="en-US" dirty="0">
-                <a:hlinkClick r:id="rId5" action="ppaction://hlinksldjump"/>
-              </a:rPr>
-              <a:t>Fundamental</a:t>
-            </a:r>
-            <a:r>
-              <a:rPr lang="en-US" dirty="0"/>
-              <a:t> - Yearly</a:t>
-            </a:r>
-          </a:p>
-          <a:p>
-            <a:pPr lvl="1"/>
-            <a:r>
-              <a:rPr lang="en-US" dirty="0">
-                <a:hlinkClick r:id="rId6" action="ppaction://hlinksldjump"/>
-              </a:rPr>
-              <a:t>13 F</a:t>
-            </a:r>
-            <a:r>
-              <a:rPr lang="en-US" dirty="0"/>
-              <a:t> - Quarterly</a:t>
-            </a:r>
-          </a:p>
-          <a:p>
-            <a:pPr lvl="1"/>
-            <a:r>
-              <a:rPr lang="en-US" dirty="0">
-                <a:hlinkClick r:id="rId7" action="ppaction://hlinksldjump"/>
-              </a:rPr>
-              <a:t>Historical Stock Price</a:t>
-            </a:r>
-            <a:r>
-              <a:rPr lang="en-US" dirty="0"/>
-              <a:t> - Daily</a:t>
-            </a:r>
-          </a:p>
-          <a:p>
-            <a:r>
-              <a:rPr lang="en-US" dirty="0">
-                <a:hlinkClick r:id="rId8" action="ppaction://hlinksldjump"/>
-              </a:rPr>
-              <a:t>Variable dimension Breakdown</a:t>
-            </a:r>
-            <a:endParaRPr lang="en-US" dirty="0"/>
-          </a:p>
-          <a:p>
-            <a:r>
-              <a:rPr lang="en-US" dirty="0">
-                <a:hlinkClick r:id="rId9" action="ppaction://hlinksldjump"/>
-              </a:rPr>
-              <a:t>LaTeX Dissertation Progress</a:t>
-            </a:r>
-            <a:endParaRPr lang="en-US" dirty="0"/>
-          </a:p>
-          <a:p>
-            <a:r>
-              <a:rPr lang="en-US" dirty="0">
-                <a:hlinkClick r:id="rId10" action="ppaction://hlinksldjump"/>
-              </a:rPr>
-              <a:t>Timeline</a:t>
-            </a:r>
-            <a:endParaRPr lang="en-US" dirty="0"/>
-          </a:p>
-          <a:p>
+        </p:txBody>
+      </p:sp>
+      <p:sp>
+        <p:nvSpPr>
+          <p:cNvPr id="5" name="Rectangle 4">
+            <a:hlinkClick r:id="rId3" action="ppaction://hlinksldjump"/>
+            <a:extLst>
+              <a:ext uri="{FF2B5EF4-FFF2-40B4-BE49-F238E27FC236}">
+                <a16:creationId xmlns:a16="http://schemas.microsoft.com/office/drawing/2014/main" id="{34753DEC-98F8-F8C7-62ED-9A624AF5ACE2}"/>
+              </a:ext>
+            </a:extLst>
+          </p:cNvPr>
+          <p:cNvSpPr/>
+          <p:nvPr/>
+        </p:nvSpPr>
+        <p:spPr>
+          <a:xfrm>
+            <a:off x="10028871" y="268831"/>
+            <a:ext cx="1717288" cy="654621"/>
+          </a:xfrm>
+          <a:prstGeom prst="rect">
+            <a:avLst/>
+          </a:prstGeom>
+        </p:spPr>
+        <p:style>
+          <a:lnRef idx="2">
+            <a:schemeClr val="accent1">
+              <a:shade val="15000"/>
+            </a:schemeClr>
+          </a:lnRef>
+          <a:fillRef idx="1">
+            <a:schemeClr val="accent1"/>
+          </a:fillRef>
+          <a:effectRef idx="0">
+            <a:schemeClr val="accent1"/>
+          </a:effectRef>
+          <a:fontRef idx="minor">
+            <a:schemeClr val="lt1"/>
+          </a:fontRef>
+        </p:style>
+        <p:txBody>
+          <a:bodyPr rtlCol="0" anchor="ctr"/>
+          <a:lstStyle/>
+          <a:p>
+            <a:pPr algn="ctr"/>
+            <a:r>
+              <a:rPr lang="en-US" sz="2800" dirty="0"/>
+              <a:t>Return</a:t>
+            </a:r>
             <a:endParaRPr lang="en-US" dirty="0"/>
           </a:p>
         </p:txBody>
       </p:sp>
       <p:pic>
         <p:nvPicPr>
-          <p:cNvPr id="4" name="Picture 3">
-            <a:extLst>
-              <a:ext uri="{FF2B5EF4-FFF2-40B4-BE49-F238E27FC236}">
-                <a16:creationId xmlns:a16="http://schemas.microsoft.com/office/drawing/2014/main" id="{10C126EE-388C-B36A-17CA-CC22E28D2D25}"/>
+          <p:cNvPr id="10" name="Picture 9">
+            <a:extLst>
+              <a:ext uri="{FF2B5EF4-FFF2-40B4-BE49-F238E27FC236}">
+                <a16:creationId xmlns:a16="http://schemas.microsoft.com/office/drawing/2014/main" id="{24F96EA9-E183-2AC3-B8CC-BA866C2B9875}"/>
               </a:ext>
             </a:extLst>
           </p:cNvPr>
@@ -6198,15 +6355,15 @@
           <p:nvPr/>
         </p:nvPicPr>
         <p:blipFill>
-          <a:blip r:embed="rId11"/>
+          <a:blip r:embed="rId4"/>
           <a:stretch>
             <a:fillRect/>
           </a:stretch>
         </p:blipFill>
         <p:spPr>
           <a:xfrm>
-            <a:off x="4337966" y="2468881"/>
-            <a:ext cx="7651731" cy="3422245"/>
+            <a:off x="6589894" y="1231018"/>
+            <a:ext cx="5373087" cy="5324018"/>
           </a:xfrm>
           <a:prstGeom prst="rect">
             <a:avLst/>
@@ -6216,7 +6373,7 @@
     </p:spTree>
     <p:extLst>
       <p:ext uri="{BB962C8B-B14F-4D97-AF65-F5344CB8AC3E}">
-        <p14:creationId xmlns:p14="http://schemas.microsoft.com/office/powerpoint/2010/main" val="3421149949"/>
+        <p14:creationId xmlns:p14="http://schemas.microsoft.com/office/powerpoint/2010/main" val="344136421"/>
       </p:ext>
     </p:extLst>
   </p:cSld>
@@ -6248,7 +6405,7 @@
           <p:cNvPr id="2" name="Title 1">
             <a:extLst>
               <a:ext uri="{FF2B5EF4-FFF2-40B4-BE49-F238E27FC236}">
-                <a16:creationId xmlns:a16="http://schemas.microsoft.com/office/drawing/2014/main" id="{C49DDF54-23ED-8E88-BB7D-2321E0A7E522}"/>
+                <a16:creationId xmlns:a16="http://schemas.microsoft.com/office/drawing/2014/main" id="{83CFF689-C0EA-F49A-5289-ED350C849154}"/>
               </a:ext>
             </a:extLst>
           </p:cNvPr>
@@ -6258,205 +6415,85 @@
           <p:nvPr>
             <p:ph type="title"/>
           </p:nvPr>
-        </p:nvSpPr>
-        <p:spPr/>
-        <p:txBody>
-          <a:bodyPr>
-            <a:normAutofit fontScale="90000"/>
-          </a:bodyPr>
-          <a:lstStyle/>
-          <a:p>
-            <a:r>
-              <a:rPr lang="en-US" dirty="0" err="1"/>
-              <a:t>Portofolio</a:t>
-            </a:r>
-            <a:r>
-              <a:rPr lang="en-US" dirty="0"/>
-              <a:t> Selections</a:t>
-            </a:r>
-            <a:br>
-              <a:rPr lang="en-US" dirty="0"/>
-            </a:br>
-            <a:r>
-              <a:rPr lang="en-US" dirty="0"/>
-              <a:t>(14 Tech sector stocks)</a:t>
-            </a:r>
-          </a:p>
-        </p:txBody>
-      </p:sp>
-      <p:sp>
-        <p:nvSpPr>
-          <p:cNvPr id="3" name="Content Placeholder 2">
-            <a:extLst>
-              <a:ext uri="{FF2B5EF4-FFF2-40B4-BE49-F238E27FC236}">
-                <a16:creationId xmlns:a16="http://schemas.microsoft.com/office/drawing/2014/main" id="{58962047-C16A-2459-7983-BD21002F7FB8}"/>
-              </a:ext>
-            </a:extLst>
-          </p:cNvPr>
-          <p:cNvSpPr>
-            <a:spLocks noGrp="1"/>
-          </p:cNvSpPr>
-          <p:nvPr>
-            <p:ph idx="1"/>
-          </p:nvPr>
-        </p:nvSpPr>
-        <p:spPr/>
-        <p:txBody>
-          <a:bodyPr/>
-          <a:lstStyle/>
-          <a:p>
-            <a:r>
-              <a:rPr lang="en-US" b="1" dirty="0">
-                <a:solidFill>
-                  <a:srgbClr val="FF0000"/>
-                </a:solidFill>
-              </a:rPr>
-              <a:t>Mega-cap tech</a:t>
-            </a:r>
-            <a:r>
-              <a:rPr lang="en-US" dirty="0"/>
-              <a:t>: AAPL, MSFT(</a:t>
-            </a:r>
-            <a:r>
-              <a:rPr lang="en-US" dirty="0" err="1"/>
-              <a:t>IaaS,SaaS</a:t>
-            </a:r>
-            <a:r>
-              <a:rPr lang="en-US" dirty="0"/>
-              <a:t>), AMZN(IaaS), GOOGL, META, NVDA</a:t>
-            </a:r>
-          </a:p>
-          <a:p>
-            <a:pPr lvl="1"/>
-            <a:r>
-              <a:rPr lang="en-US" dirty="0"/>
-              <a:t>Stable</a:t>
-            </a:r>
-            <a:r>
-              <a:rPr lang="zh-CN" altLang="en-US" dirty="0"/>
-              <a:t> </a:t>
-            </a:r>
-            <a:r>
-              <a:rPr lang="en-US" altLang="zh-CN" dirty="0"/>
-              <a:t>Stocks</a:t>
-            </a:r>
-            <a:endParaRPr lang="en-US" dirty="0"/>
-          </a:p>
-          <a:p>
-            <a:r>
-              <a:rPr lang="en-US" b="1" dirty="0">
-                <a:solidFill>
-                  <a:srgbClr val="FF0000"/>
-                </a:solidFill>
-              </a:rPr>
-              <a:t>High-conviction growth</a:t>
-            </a:r>
-            <a:r>
-              <a:rPr lang="en-US" dirty="0"/>
-              <a:t>: TSLA, AMD(Design CPUGPU), PLTR(AI Platform), SNOW(PaaS</a:t>
-            </a:r>
-            <a:r>
-              <a:rPr lang="en-US" altLang="zh-CN" dirty="0"/>
-              <a:t>/SaaS</a:t>
-            </a:r>
-            <a:r>
-              <a:rPr lang="en-US" dirty="0"/>
-              <a:t>), SHOP(Ecommerce)</a:t>
-            </a:r>
-          </a:p>
-          <a:p>
-            <a:pPr lvl="1"/>
-            <a:r>
-              <a:rPr lang="en-US" dirty="0"/>
-              <a:t>Volatile stocks</a:t>
-            </a:r>
-          </a:p>
-          <a:p>
-            <a:r>
-              <a:rPr lang="en-US" b="1" dirty="0">
-                <a:solidFill>
-                  <a:srgbClr val="FF0000"/>
-                </a:solidFill>
-              </a:rPr>
-              <a:t>Subsector representation</a:t>
-            </a:r>
-            <a:r>
-              <a:rPr lang="en-US" dirty="0"/>
-              <a:t>: ASML (</a:t>
-            </a:r>
-            <a:r>
-              <a:rPr lang="en-US" dirty="0" err="1"/>
-              <a:t>semicon</a:t>
-            </a:r>
-            <a:r>
-              <a:rPr lang="zh-CN" altLang="en-US" dirty="0"/>
-              <a:t> </a:t>
-            </a:r>
-            <a:r>
-              <a:rPr lang="en-US" altLang="zh-CN" dirty="0"/>
-              <a:t>equipment</a:t>
-            </a:r>
-            <a:r>
-              <a:rPr lang="en-US" dirty="0"/>
-              <a:t>), CRM (SaaS), PANW (cybersecurity)</a:t>
-            </a:r>
-          </a:p>
-          <a:p>
-            <a:pPr lvl="1"/>
-            <a:r>
-              <a:rPr lang="en-US" dirty="0"/>
-              <a:t>Other important Tech related stocks</a:t>
-            </a:r>
-          </a:p>
-        </p:txBody>
-      </p:sp>
-      <p:sp>
-        <p:nvSpPr>
-          <p:cNvPr id="5" name="Rectangle 4">
-            <a:hlinkClick r:id="rId3" action="ppaction://hlinksldjump"/>
-            <a:extLst>
-              <a:ext uri="{FF2B5EF4-FFF2-40B4-BE49-F238E27FC236}">
-                <a16:creationId xmlns:a16="http://schemas.microsoft.com/office/drawing/2014/main" id="{5BA1AF0B-3A6A-88EF-DC76-74AE557DF685}"/>
-              </a:ext>
-            </a:extLst>
-          </p:cNvPr>
-          <p:cNvSpPr/>
-          <p:nvPr/>
         </p:nvSpPr>
         <p:spPr>
           <a:xfrm>
-            <a:off x="9834633" y="1207010"/>
-            <a:ext cx="1717288" cy="654621"/>
+            <a:off x="203799" y="1056557"/>
+            <a:ext cx="10890929" cy="1097280"/>
           </a:xfrm>
-          <a:prstGeom prst="rect">
-            <a:avLst/>
-          </a:prstGeom>
         </p:spPr>
-        <p:style>
-          <a:lnRef idx="2">
-            <a:schemeClr val="accent1">
-              <a:shade val="15000"/>
-            </a:schemeClr>
-          </a:lnRef>
-          <a:fillRef idx="1">
-            <a:schemeClr val="accent1"/>
-          </a:fillRef>
-          <a:effectRef idx="0">
-            <a:schemeClr val="accent1"/>
-          </a:effectRef>
-          <a:fontRef idx="minor">
-            <a:schemeClr val="lt1"/>
-          </a:fontRef>
-        </p:style>
-        <p:txBody>
-          <a:bodyPr rtlCol="0" anchor="ctr"/>
-          <a:lstStyle/>
-          <a:p>
-            <a:pPr algn="ctr"/>
-            <a:r>
-              <a:rPr lang="en-US" sz="2800" dirty="0"/>
-              <a:t>Return</a:t>
-            </a:r>
+        <p:txBody>
+          <a:bodyPr/>
+          <a:lstStyle/>
+          <a:p>
+            <a:r>
+              <a:rPr lang="en-US" dirty="0"/>
+              <a:t>Table of Content</a:t>
+            </a:r>
+          </a:p>
+        </p:txBody>
+      </p:sp>
+      <p:sp>
+        <p:nvSpPr>
+          <p:cNvPr id="3" name="Content Placeholder 2">
+            <a:extLst>
+              <a:ext uri="{FF2B5EF4-FFF2-40B4-BE49-F238E27FC236}">
+                <a16:creationId xmlns:a16="http://schemas.microsoft.com/office/drawing/2014/main" id="{1F1B0E3E-3269-F4B1-4B4D-3C3F5E3C4B58}"/>
+              </a:ext>
+            </a:extLst>
+          </p:cNvPr>
+          <p:cNvSpPr>
+            <a:spLocks noGrp="1"/>
+          </p:cNvSpPr>
+          <p:nvPr>
+            <p:ph idx="1"/>
+          </p:nvPr>
+        </p:nvSpPr>
+        <p:spPr>
+          <a:xfrm>
+            <a:off x="203799" y="2763561"/>
+            <a:ext cx="5881744" cy="3566160"/>
+          </a:xfrm>
+        </p:spPr>
+        <p:txBody>
+          <a:bodyPr>
+            <a:normAutofit/>
+          </a:bodyPr>
+          <a:lstStyle/>
+          <a:p>
+            <a:r>
+              <a:rPr lang="en-US" dirty="0">
+                <a:hlinkClick r:id="rId3" action="ppaction://hlinksldjump"/>
+              </a:rPr>
+              <a:t>Model Pipeline Construction</a:t>
+            </a:r>
+            <a:endParaRPr lang="en-US" dirty="0"/>
+          </a:p>
+          <a:p>
+            <a:r>
+              <a:rPr lang="en-US" dirty="0">
+                <a:hlinkClick r:id="rId4" action="ppaction://hlinksldjump"/>
+              </a:rPr>
+              <a:t>LaTeX Dissertation Progress and my next steps</a:t>
+            </a:r>
+            <a:r>
+              <a:rPr lang="en-US" dirty="0">
+                <a:hlinkClick r:id="rId4" action="ppaction://hlinksldjump"/>
+              </a:rPr>
+              <a:t>  </a:t>
+            </a:r>
+            <a:endParaRPr lang="en-US" dirty="0"/>
+          </a:p>
+          <a:p>
+            <a:r>
+              <a:rPr lang="en-US" dirty="0">
+                <a:hlinkClick r:id="rId5" action="ppaction://hlinksldjump"/>
+              </a:rPr>
+              <a:t>Timeline</a:t>
+            </a:r>
+            <a:endParaRPr lang="en-US" dirty="0"/>
+          </a:p>
+          <a:p>
             <a:endParaRPr lang="en-US" dirty="0"/>
           </a:p>
         </p:txBody>
@@ -6464,7 +6501,7 @@
     </p:spTree>
     <p:extLst>
       <p:ext uri="{BB962C8B-B14F-4D97-AF65-F5344CB8AC3E}">
-        <p14:creationId xmlns:p14="http://schemas.microsoft.com/office/powerpoint/2010/main" val="1986066791"/>
+        <p14:creationId xmlns:p14="http://schemas.microsoft.com/office/powerpoint/2010/main" val="3421149949"/>
       </p:ext>
     </p:extLst>
   </p:cSld>
@@ -6496,7 +6533,7 @@
           <p:cNvPr id="2" name="Title 1">
             <a:extLst>
               <a:ext uri="{FF2B5EF4-FFF2-40B4-BE49-F238E27FC236}">
-                <a16:creationId xmlns:a16="http://schemas.microsoft.com/office/drawing/2014/main" id="{9741D204-93ED-4586-255F-F836142DB389}"/>
+                <a16:creationId xmlns:a16="http://schemas.microsoft.com/office/drawing/2014/main" id="{C09604A9-F414-B8D9-62F3-B3C913330A15}"/>
               </a:ext>
             </a:extLst>
           </p:cNvPr>
@@ -6507,51 +6544,54 @@
             <p:ph type="title"/>
           </p:nvPr>
         </p:nvSpPr>
+        <p:spPr>
+          <a:xfrm>
+            <a:off x="640079" y="109728"/>
+            <a:ext cx="10890929" cy="1097280"/>
+          </a:xfrm>
+        </p:spPr>
+        <p:txBody>
+          <a:bodyPr/>
+          <a:lstStyle/>
+          <a:p>
+            <a:r>
+              <a:rPr lang="en-US" dirty="0"/>
+              <a:t>Model Pipeline Construction</a:t>
+            </a:r>
+          </a:p>
+        </p:txBody>
+      </p:sp>
+      <p:sp>
+        <p:nvSpPr>
+          <p:cNvPr id="3" name="Content Placeholder 2">
+            <a:extLst>
+              <a:ext uri="{FF2B5EF4-FFF2-40B4-BE49-F238E27FC236}">
+                <a16:creationId xmlns:a16="http://schemas.microsoft.com/office/drawing/2014/main" id="{8F7344F8-071B-9994-5037-82587E744C37}"/>
+              </a:ext>
+            </a:extLst>
+          </p:cNvPr>
+          <p:cNvSpPr>
+            <a:spLocks noGrp="1"/>
+          </p:cNvSpPr>
+          <p:nvPr>
+            <p:ph idx="1"/>
+          </p:nvPr>
+        </p:nvSpPr>
         <p:spPr/>
         <p:txBody>
-          <a:bodyPr>
-            <a:normAutofit/>
-          </a:bodyPr>
-          <a:lstStyle/>
-          <a:p>
-            <a:r>
-              <a:rPr lang="en-US" dirty="0"/>
-              <a:t>Data Cleaning – Macro</a:t>
-            </a:r>
-          </a:p>
-        </p:txBody>
-      </p:sp>
-      <p:sp>
-        <p:nvSpPr>
-          <p:cNvPr id="3" name="Content Placeholder 2">
-            <a:extLst>
-              <a:ext uri="{FF2B5EF4-FFF2-40B4-BE49-F238E27FC236}">
-                <a16:creationId xmlns:a16="http://schemas.microsoft.com/office/drawing/2014/main" id="{81F22694-D162-B253-4D8B-791BC889E332}"/>
-              </a:ext>
-            </a:extLst>
-          </p:cNvPr>
-          <p:cNvSpPr>
-            <a:spLocks noGrp="1"/>
-          </p:cNvSpPr>
-          <p:nvPr>
-            <p:ph idx="1"/>
-          </p:nvPr>
-        </p:nvSpPr>
-        <p:spPr/>
-        <p:txBody>
           <a:bodyPr/>
           <a:lstStyle/>
           <a:p>
-            <a:endParaRPr lang="en-US"/>
+            <a:endParaRPr lang="en-US" dirty="0"/>
           </a:p>
         </p:txBody>
       </p:sp>
       <p:pic>
         <p:nvPicPr>
-          <p:cNvPr id="4" name="Picture 3">
-            <a:extLst>
-              <a:ext uri="{FF2B5EF4-FFF2-40B4-BE49-F238E27FC236}">
-                <a16:creationId xmlns:a16="http://schemas.microsoft.com/office/drawing/2014/main" id="{C06003FA-0597-CA0A-793A-042F5FD60296}"/>
+          <p:cNvPr id="13" name="Picture 12">
+            <a:extLst>
+              <a:ext uri="{FF2B5EF4-FFF2-40B4-BE49-F238E27FC236}">
+                <a16:creationId xmlns:a16="http://schemas.microsoft.com/office/drawing/2014/main" id="{8DFEF4A0-BFCA-1D00-541D-6C5149AA61CC}"/>
               </a:ext>
             </a:extLst>
           </p:cNvPr>
@@ -6561,15 +6601,15 @@
           <p:nvPr/>
         </p:nvPicPr>
         <p:blipFill>
-          <a:blip r:embed="rId2"/>
+          <a:blip r:embed="rId3"/>
           <a:stretch>
             <a:fillRect/>
           </a:stretch>
         </p:blipFill>
         <p:spPr>
           <a:xfrm>
-            <a:off x="2177519" y="2162710"/>
-            <a:ext cx="7836962" cy="4452819"/>
+            <a:off x="1299760" y="757195"/>
+            <a:ext cx="9495239" cy="6100805"/>
           </a:xfrm>
           <a:prstGeom prst="rect">
             <a:avLst/>
@@ -6578,59 +6618,245 @@
       </p:pic>
       <p:sp>
         <p:nvSpPr>
-          <p:cNvPr id="5" name="Rectangle 4">
-            <a:hlinkClick r:id="rId3" action="ppaction://hlinksldjump"/>
-            <a:extLst>
-              <a:ext uri="{FF2B5EF4-FFF2-40B4-BE49-F238E27FC236}">
-                <a16:creationId xmlns:a16="http://schemas.microsoft.com/office/drawing/2014/main" id="{1A0E5A9E-C8E4-9C57-46D0-3F8B00EBDFA8}"/>
-              </a:ext>
-            </a:extLst>
-          </p:cNvPr>
-          <p:cNvSpPr/>
+          <p:cNvPr id="6" name="TextBox 5">
+            <a:extLst>
+              <a:ext uri="{FF2B5EF4-FFF2-40B4-BE49-F238E27FC236}">
+                <a16:creationId xmlns:a16="http://schemas.microsoft.com/office/drawing/2014/main" id="{3963863C-F33A-C4AA-E5B5-CDBE916125CE}"/>
+              </a:ext>
+            </a:extLst>
+          </p:cNvPr>
+          <p:cNvSpPr txBox="1"/>
           <p:nvPr/>
         </p:nvSpPr>
         <p:spPr>
           <a:xfrm>
-            <a:off x="10014481" y="331057"/>
-            <a:ext cx="1717288" cy="654621"/>
+            <a:off x="4731126" y="1469656"/>
+            <a:ext cx="3339347" cy="369332"/>
           </a:xfrm>
           <a:prstGeom prst="rect">
             <a:avLst/>
           </a:prstGeom>
+          <a:noFill/>
         </p:spPr>
-        <p:style>
-          <a:lnRef idx="2">
-            <a:schemeClr val="accent1">
-              <a:shade val="15000"/>
-            </a:schemeClr>
-          </a:lnRef>
-          <a:fillRef idx="1">
-            <a:schemeClr val="accent1"/>
-          </a:fillRef>
-          <a:effectRef idx="0">
-            <a:schemeClr val="accent1"/>
-          </a:effectRef>
-          <a:fontRef idx="minor">
-            <a:schemeClr val="lt1"/>
-          </a:fontRef>
-        </p:style>
-        <p:txBody>
-          <a:bodyPr rtlCol="0" anchor="ctr"/>
-          <a:lstStyle/>
-          <a:p>
-            <a:pPr algn="ctr"/>
-            <a:r>
-              <a:rPr lang="en-US" sz="2800" dirty="0"/>
-              <a:t>Return</a:t>
+        <p:txBody>
+          <a:bodyPr wrap="square" rtlCol="0">
+            <a:spAutoFit/>
+          </a:bodyPr>
+          <a:lstStyle/>
+          <a:p>
+            <a:r>
+              <a:rPr lang="en-US" dirty="0">
+                <a:hlinkClick r:id="rId4" action="ppaction://hlinksldjump"/>
+              </a:rPr>
+              <a:t>(1)How 13 F Makes Money</a:t>
+            </a:r>
+            <a:endParaRPr lang="en-US" b="1" dirty="0"/>
+          </a:p>
+        </p:txBody>
+      </p:sp>
+      <p:sp>
+        <p:nvSpPr>
+          <p:cNvPr id="7" name="TextBox 6">
+            <a:extLst>
+              <a:ext uri="{FF2B5EF4-FFF2-40B4-BE49-F238E27FC236}">
+                <a16:creationId xmlns:a16="http://schemas.microsoft.com/office/drawing/2014/main" id="{30B8A983-F612-2112-D14B-B2051D2A7BE8}"/>
+              </a:ext>
+            </a:extLst>
+          </p:cNvPr>
+          <p:cNvSpPr txBox="1"/>
+          <p:nvPr/>
+        </p:nvSpPr>
+        <p:spPr>
+          <a:xfrm>
+            <a:off x="1108114" y="5281011"/>
+            <a:ext cx="2215466" cy="369332"/>
+          </a:xfrm>
+          <a:prstGeom prst="rect">
+            <a:avLst/>
+          </a:prstGeom>
+          <a:noFill/>
+        </p:spPr>
+        <p:txBody>
+          <a:bodyPr wrap="square">
+            <a:spAutoFit/>
+          </a:bodyPr>
+          <a:lstStyle/>
+          <a:p>
+            <a:r>
+              <a:rPr lang="en-US" dirty="0">
+                <a:hlinkClick r:id="rId5" action="ppaction://hlinksldjump"/>
+              </a:rPr>
+              <a:t>(2)Real PCT Change</a:t>
             </a:r>
             <a:endParaRPr lang="en-US" dirty="0"/>
+          </a:p>
+        </p:txBody>
+      </p:sp>
+      <p:sp>
+        <p:nvSpPr>
+          <p:cNvPr id="8" name="TextBox 7">
+            <a:extLst>
+              <a:ext uri="{FF2B5EF4-FFF2-40B4-BE49-F238E27FC236}">
+                <a16:creationId xmlns:a16="http://schemas.microsoft.com/office/drawing/2014/main" id="{F6609280-D65D-8C44-BE87-39CFAA6B1474}"/>
+              </a:ext>
+            </a:extLst>
+          </p:cNvPr>
+          <p:cNvSpPr txBox="1"/>
+          <p:nvPr/>
+        </p:nvSpPr>
+        <p:spPr>
+          <a:xfrm>
+            <a:off x="6494061" y="4843103"/>
+            <a:ext cx="2324866" cy="369332"/>
+          </a:xfrm>
+          <a:prstGeom prst="rect">
+            <a:avLst/>
+          </a:prstGeom>
+          <a:noFill/>
+        </p:spPr>
+        <p:txBody>
+          <a:bodyPr wrap="square">
+            <a:spAutoFit/>
+          </a:bodyPr>
+          <a:lstStyle/>
+          <a:p>
+            <a:r>
+              <a:rPr lang="en-US" dirty="0">
+                <a:hlinkClick r:id="rId6" action="ppaction://hlinksldjump"/>
+              </a:rPr>
+              <a:t>(3</a:t>
+            </a:r>
+            <a:r>
+              <a:rPr lang="en-US" dirty="0">
+                <a:hlinkClick r:id="rId7" action="ppaction://hlinksldjump"/>
+              </a:rPr>
+              <a:t>)</a:t>
+            </a:r>
+            <a:endParaRPr lang="en-US" dirty="0"/>
+          </a:p>
+        </p:txBody>
+      </p:sp>
+      <p:sp>
+        <p:nvSpPr>
+          <p:cNvPr id="9" name="TextBox 8">
+            <a:extLst>
+              <a:ext uri="{FF2B5EF4-FFF2-40B4-BE49-F238E27FC236}">
+                <a16:creationId xmlns:a16="http://schemas.microsoft.com/office/drawing/2014/main" id="{4243BE95-6EC9-8C7F-82E9-A888FF9C7603}"/>
+              </a:ext>
+            </a:extLst>
+          </p:cNvPr>
+          <p:cNvSpPr txBox="1"/>
+          <p:nvPr/>
+        </p:nvSpPr>
+        <p:spPr>
+          <a:xfrm>
+            <a:off x="3507823" y="5537208"/>
+            <a:ext cx="2707391" cy="369332"/>
+          </a:xfrm>
+          <a:prstGeom prst="rect">
+            <a:avLst/>
+          </a:prstGeom>
+          <a:noFill/>
+        </p:spPr>
+        <p:txBody>
+          <a:bodyPr wrap="square">
+            <a:spAutoFit/>
+          </a:bodyPr>
+          <a:lstStyle/>
+          <a:p>
+            <a:r>
+              <a:rPr lang="en-US" dirty="0">
+                <a:hlinkClick r:id="rId8" action="ppaction://hlinksldjump"/>
+              </a:rPr>
+              <a:t>(4)</a:t>
+            </a:r>
+            <a:endParaRPr lang="en-US" dirty="0"/>
+          </a:p>
+        </p:txBody>
+      </p:sp>
+      <p:sp>
+        <p:nvSpPr>
+          <p:cNvPr id="10" name="TextBox 9">
+            <a:extLst>
+              <a:ext uri="{FF2B5EF4-FFF2-40B4-BE49-F238E27FC236}">
+                <a16:creationId xmlns:a16="http://schemas.microsoft.com/office/drawing/2014/main" id="{EA978B75-6675-3C31-45D0-2322DDD2F84E}"/>
+              </a:ext>
+            </a:extLst>
+          </p:cNvPr>
+          <p:cNvSpPr txBox="1"/>
+          <p:nvPr/>
+        </p:nvSpPr>
+        <p:spPr>
+          <a:xfrm>
+            <a:off x="4861518" y="6435380"/>
+            <a:ext cx="1893530" cy="369332"/>
+          </a:xfrm>
+          <a:prstGeom prst="rect">
+            <a:avLst/>
+          </a:prstGeom>
+          <a:noFill/>
+        </p:spPr>
+        <p:txBody>
+          <a:bodyPr wrap="square">
+            <a:spAutoFit/>
+          </a:bodyPr>
+          <a:lstStyle/>
+          <a:p>
+            <a:r>
+              <a:rPr lang="en-US" dirty="0">
+                <a:hlinkClick r:id="rId9" action="ppaction://hlinksldjump"/>
+              </a:rPr>
+              <a:t>(5)</a:t>
+            </a:r>
+            <a:endParaRPr lang="en-US" dirty="0"/>
+          </a:p>
+        </p:txBody>
+      </p:sp>
+      <p:sp>
+        <p:nvSpPr>
+          <p:cNvPr id="12" name="TextBox 11">
+            <a:extLst>
+              <a:ext uri="{FF2B5EF4-FFF2-40B4-BE49-F238E27FC236}">
+                <a16:creationId xmlns:a16="http://schemas.microsoft.com/office/drawing/2014/main" id="{CD762F77-ACB6-BE48-0472-26E9A914F929}"/>
+              </a:ext>
+            </a:extLst>
+          </p:cNvPr>
+          <p:cNvSpPr txBox="1"/>
+          <p:nvPr/>
+        </p:nvSpPr>
+        <p:spPr>
+          <a:xfrm>
+            <a:off x="8429146" y="5330309"/>
+            <a:ext cx="3286105" cy="646331"/>
+          </a:xfrm>
+          <a:prstGeom prst="rect">
+            <a:avLst/>
+          </a:prstGeom>
+          <a:noFill/>
+        </p:spPr>
+        <p:txBody>
+          <a:bodyPr wrap="square">
+            <a:spAutoFit/>
+          </a:bodyPr>
+          <a:lstStyle/>
+          <a:p>
+            <a:r>
+              <a:rPr lang="en-US" dirty="0">
+                <a:hlinkClick r:id="rId9" action="ppaction://hlinksldjump"/>
+              </a:rPr>
+              <a:t>(6)</a:t>
+            </a:r>
+            <a:r>
+              <a:rPr lang="en-US" dirty="0"/>
+              <a:t> Still in progress, aligning the dataset for quarterly</a:t>
+            </a:r>
           </a:p>
         </p:txBody>
       </p:sp>
     </p:spTree>
     <p:extLst>
       <p:ext uri="{BB962C8B-B14F-4D97-AF65-F5344CB8AC3E}">
-        <p14:creationId xmlns:p14="http://schemas.microsoft.com/office/powerpoint/2010/main" val="227951732"/>
+        <p14:creationId xmlns:p14="http://schemas.microsoft.com/office/powerpoint/2010/main" val="401059744"/>
       </p:ext>
     </p:extLst>
   </p:cSld>
@@ -6662,7 +6888,7 @@
           <p:cNvPr id="2" name="Title 1">
             <a:extLst>
               <a:ext uri="{FF2B5EF4-FFF2-40B4-BE49-F238E27FC236}">
-                <a16:creationId xmlns:a16="http://schemas.microsoft.com/office/drawing/2014/main" id="{DB35D0C0-E1F9-3E6C-A7BF-07BD7B90DC6B}"/>
+                <a16:creationId xmlns:a16="http://schemas.microsoft.com/office/drawing/2014/main" id="{8429580D-6087-4392-3C25-E96BD4579EC2}"/>
               </a:ext>
             </a:extLst>
           </p:cNvPr>
@@ -6675,191 +6901,38 @@
         </p:nvSpPr>
         <p:spPr>
           <a:xfrm>
-            <a:off x="640079" y="1049749"/>
+            <a:off x="308775" y="1361263"/>
             <a:ext cx="10890929" cy="1097280"/>
           </a:xfrm>
         </p:spPr>
         <p:txBody>
-          <a:bodyPr>
-            <a:normAutofit fontScale="90000"/>
-          </a:bodyPr>
+          <a:bodyPr/>
           <a:lstStyle/>
           <a:p>
             <a:r>
               <a:rPr lang="en-US" dirty="0"/>
-              <a:t>Data Cleaning - Fundamental</a:t>
-            </a:r>
-            <a:br>
-              <a:rPr lang="en-US" dirty="0"/>
-            </a:br>
-            <a:r>
-              <a:rPr lang="en-US" dirty="0" err="1"/>
-              <a:t>M</a:t>
-            </a:r>
-            <a:r>
-              <a:rPr lang="en-US" altLang="zh-CN" dirty="0" err="1"/>
-              <a:t>erged_BS</a:t>
-            </a:r>
-            <a:r>
-              <a:rPr lang="en-US" altLang="zh-CN" dirty="0"/>
-              <a:t>, </a:t>
-            </a:r>
-            <a:r>
-              <a:rPr lang="en-US" dirty="0" err="1"/>
-              <a:t>M</a:t>
-            </a:r>
-            <a:r>
-              <a:rPr lang="en-US" altLang="zh-CN" dirty="0" err="1"/>
-              <a:t>erged_CFS</a:t>
-            </a:r>
-            <a:r>
-              <a:rPr lang="en-US" altLang="zh-CN" dirty="0"/>
-              <a:t>, </a:t>
-            </a:r>
-            <a:r>
-              <a:rPr lang="en-US" dirty="0" err="1"/>
-              <a:t>M</a:t>
-            </a:r>
-            <a:r>
-              <a:rPr lang="en-US" altLang="zh-CN" dirty="0" err="1"/>
-              <a:t>erged_IS</a:t>
-            </a:r>
-            <a:endParaRPr lang="en-US" dirty="0"/>
-          </a:p>
-        </p:txBody>
-      </p:sp>
-      <p:sp>
-        <p:nvSpPr>
-          <p:cNvPr id="3" name="Content Placeholder 2">
-            <a:extLst>
-              <a:ext uri="{FF2B5EF4-FFF2-40B4-BE49-F238E27FC236}">
-                <a16:creationId xmlns:a16="http://schemas.microsoft.com/office/drawing/2014/main" id="{59BC5A14-8D49-442A-F79B-6792292477CA}"/>
-              </a:ext>
-            </a:extLst>
-          </p:cNvPr>
-          <p:cNvSpPr>
-            <a:spLocks noGrp="1"/>
-          </p:cNvSpPr>
-          <p:nvPr>
-            <p:ph idx="1"/>
-          </p:nvPr>
-        </p:nvSpPr>
-        <p:spPr/>
-        <p:txBody>
-          <a:bodyPr/>
-          <a:lstStyle/>
-          <a:p>
-            <a:endParaRPr lang="en-US" dirty="0"/>
-          </a:p>
-        </p:txBody>
-      </p:sp>
-      <p:pic>
-        <p:nvPicPr>
-          <p:cNvPr id="4" name="Picture 3">
-            <a:extLst>
-              <a:ext uri="{FF2B5EF4-FFF2-40B4-BE49-F238E27FC236}">
-                <a16:creationId xmlns:a16="http://schemas.microsoft.com/office/drawing/2014/main" id="{2DA4CC08-B448-91D4-26E8-68F489212FF0}"/>
-              </a:ext>
-            </a:extLst>
-          </p:cNvPr>
-          <p:cNvPicPr>
-            <a:picLocks noChangeAspect="1"/>
-          </p:cNvPicPr>
+              <a:t>(1) How 13 F makes money</a:t>
+            </a:r>
+          </a:p>
+        </p:txBody>
+      </p:sp>
+      <p:sp>
+        <p:nvSpPr>
+          <p:cNvPr id="5" name="Rectangle 4">
+            <a:hlinkClick r:id="rId2" action="ppaction://hlinksldjump"/>
+            <a:extLst>
+              <a:ext uri="{FF2B5EF4-FFF2-40B4-BE49-F238E27FC236}">
+                <a16:creationId xmlns:a16="http://schemas.microsoft.com/office/drawing/2014/main" id="{90F2578B-A3AA-4F36-E554-A7D7EC90D7C7}"/>
+              </a:ext>
+            </a:extLst>
+          </p:cNvPr>
+          <p:cNvSpPr/>
           <p:nvPr/>
-        </p:nvPicPr>
-        <p:blipFill>
-          <a:blip r:embed="rId2"/>
-          <a:stretch>
-            <a:fillRect/>
-          </a:stretch>
-        </p:blipFill>
+        </p:nvSpPr>
         <p:spPr>
           <a:xfrm>
-            <a:off x="206325" y="2277742"/>
-            <a:ext cx="2958906" cy="4277620"/>
-          </a:xfrm>
-          <a:prstGeom prst="rect">
-            <a:avLst/>
-          </a:prstGeom>
-        </p:spPr>
-      </p:pic>
-      <p:pic>
-        <p:nvPicPr>
-          <p:cNvPr id="5" name="Picture 4">
-            <a:extLst>
-              <a:ext uri="{FF2B5EF4-FFF2-40B4-BE49-F238E27FC236}">
-                <a16:creationId xmlns:a16="http://schemas.microsoft.com/office/drawing/2014/main" id="{1F66A4C9-6888-C601-805A-8AD8E0A4332F}"/>
-              </a:ext>
-            </a:extLst>
-          </p:cNvPr>
-          <p:cNvPicPr>
-            <a:picLocks noChangeAspect="1"/>
-          </p:cNvPicPr>
-          <p:nvPr/>
-        </p:nvPicPr>
-        <p:blipFill>
-          <a:blip r:embed="rId3"/>
-          <a:stretch>
-            <a:fillRect/>
-          </a:stretch>
-        </p:blipFill>
-        <p:spPr>
-          <a:xfrm>
-            <a:off x="3485523" y="2279487"/>
-            <a:ext cx="4580370" cy="4275875"/>
-          </a:xfrm>
-          <a:prstGeom prst="rect">
-            <a:avLst/>
-          </a:prstGeom>
-        </p:spPr>
-      </p:pic>
-      <p:pic>
-        <p:nvPicPr>
-          <p:cNvPr id="6" name="Picture 5">
-            <a:extLst>
-              <a:ext uri="{FF2B5EF4-FFF2-40B4-BE49-F238E27FC236}">
-                <a16:creationId xmlns:a16="http://schemas.microsoft.com/office/drawing/2014/main" id="{2E8BC891-9C61-BE6C-AB48-4F5F66744A0E}"/>
-              </a:ext>
-            </a:extLst>
-          </p:cNvPr>
-          <p:cNvPicPr>
-            <a:picLocks noChangeAspect="1"/>
-          </p:cNvPicPr>
-          <p:nvPr/>
-        </p:nvPicPr>
-        <p:blipFill>
-          <a:blip r:embed="rId4"/>
-          <a:stretch>
-            <a:fillRect/>
-          </a:stretch>
-        </p:blipFill>
-        <p:spPr>
-          <a:xfrm>
-            <a:off x="8142224" y="2277742"/>
-            <a:ext cx="3897567" cy="4025857"/>
-          </a:xfrm>
-          <a:prstGeom prst="rect">
-            <a:avLst/>
-          </a:prstGeom>
-        </p:spPr>
-      </p:pic>
-      <p:sp>
-        <p:nvSpPr>
-          <p:cNvPr id="7" name="Rectangle 6">
-            <a:hlinkClick r:id="rId5" action="ppaction://hlinksldjump"/>
-            <a:extLst>
-              <a:ext uri="{FF2B5EF4-FFF2-40B4-BE49-F238E27FC236}">
-                <a16:creationId xmlns:a16="http://schemas.microsoft.com/office/drawing/2014/main" id="{07571726-12D1-DB47-D7E6-870C1CADFD1D}"/>
-              </a:ext>
-            </a:extLst>
-          </p:cNvPr>
-          <p:cNvSpPr/>
-          <p:nvPr/>
-        </p:nvSpPr>
-        <p:spPr>
-          <a:xfrm>
-            <a:off x="10091007" y="395128"/>
-            <a:ext cx="1717288" cy="654621"/>
+            <a:off x="10081499" y="102977"/>
+            <a:ext cx="1296250" cy="503053"/>
           </a:xfrm>
           <a:prstGeom prst="rect">
             <a:avLst/>
@@ -6894,10 +6967,100 @@
           </a:p>
         </p:txBody>
       </p:sp>
+      <p:pic>
+        <p:nvPicPr>
+          <p:cNvPr id="7" name="Picture 6">
+            <a:extLst>
+              <a:ext uri="{FF2B5EF4-FFF2-40B4-BE49-F238E27FC236}">
+                <a16:creationId xmlns:a16="http://schemas.microsoft.com/office/drawing/2014/main" id="{170BB86D-4269-4D38-5A9C-6B6FE2BB5ABE}"/>
+              </a:ext>
+            </a:extLst>
+          </p:cNvPr>
+          <p:cNvPicPr>
+            <a:picLocks noChangeAspect="1"/>
+          </p:cNvPicPr>
+          <p:nvPr/>
+        </p:nvPicPr>
+        <p:blipFill>
+          <a:blip r:embed="rId3"/>
+          <a:stretch>
+            <a:fillRect/>
+          </a:stretch>
+        </p:blipFill>
+        <p:spPr>
+          <a:xfrm>
+            <a:off x="6844245" y="606030"/>
+            <a:ext cx="4024052" cy="2988049"/>
+          </a:xfrm>
+          <a:prstGeom prst="rect">
+            <a:avLst/>
+          </a:prstGeom>
+        </p:spPr>
+      </p:pic>
+      <p:pic>
+        <p:nvPicPr>
+          <p:cNvPr id="8" name="Picture 7">
+            <a:extLst>
+              <a:ext uri="{FF2B5EF4-FFF2-40B4-BE49-F238E27FC236}">
+                <a16:creationId xmlns:a16="http://schemas.microsoft.com/office/drawing/2014/main" id="{67DE12FF-51AD-B5CD-48DB-777CB5CA8E39}"/>
+              </a:ext>
+            </a:extLst>
+          </p:cNvPr>
+          <p:cNvPicPr>
+            <a:picLocks noChangeAspect="1"/>
+          </p:cNvPicPr>
+          <p:nvPr/>
+        </p:nvPicPr>
+        <p:blipFill>
+          <a:blip r:embed="rId4"/>
+          <a:stretch>
+            <a:fillRect/>
+          </a:stretch>
+        </p:blipFill>
+        <p:spPr>
+          <a:xfrm>
+            <a:off x="165877" y="2710069"/>
+            <a:ext cx="6015657" cy="3358101"/>
+          </a:xfrm>
+          <a:prstGeom prst="rect">
+            <a:avLst/>
+          </a:prstGeom>
+        </p:spPr>
+      </p:pic>
+      <p:pic>
+        <p:nvPicPr>
+          <p:cNvPr id="9" name="Picture 8">
+            <a:extLst>
+              <a:ext uri="{FF2B5EF4-FFF2-40B4-BE49-F238E27FC236}">
+                <a16:creationId xmlns:a16="http://schemas.microsoft.com/office/drawing/2014/main" id="{5A4F1186-1B73-2175-D778-91A794F76F91}"/>
+              </a:ext>
+            </a:extLst>
+          </p:cNvPr>
+          <p:cNvPicPr>
+            <a:picLocks noChangeAspect="1"/>
+          </p:cNvPicPr>
+          <p:nvPr/>
+        </p:nvPicPr>
+        <p:blipFill>
+          <a:blip r:embed="rId5"/>
+          <a:stretch>
+            <a:fillRect/>
+          </a:stretch>
+        </p:blipFill>
+        <p:spPr>
+          <a:xfrm>
+            <a:off x="6700554" y="3594079"/>
+            <a:ext cx="4311435" cy="3160944"/>
+          </a:xfrm>
+          <a:prstGeom prst="rect">
+            <a:avLst/>
+          </a:prstGeom>
+        </p:spPr>
+      </p:pic>
     </p:spTree>
     <p:extLst>
       <p:ext uri="{BB962C8B-B14F-4D97-AF65-F5344CB8AC3E}">
-        <p14:creationId xmlns:p14="http://schemas.microsoft.com/office/powerpoint/2010/main" val="3992339726"/>
+        <p14:creationId xmlns:p14="http://schemas.microsoft.com/office/powerpoint/2010/main" val="81600740"/>
       </p:ext>
     </p:extLst>
   </p:cSld>
@@ -6929,7 +7092,7 @@
           <p:cNvPr id="2" name="Title 1">
             <a:extLst>
               <a:ext uri="{FF2B5EF4-FFF2-40B4-BE49-F238E27FC236}">
-                <a16:creationId xmlns:a16="http://schemas.microsoft.com/office/drawing/2014/main" id="{7F8DDEDA-350F-19AE-092B-D1E1FE674879}"/>
+                <a16:creationId xmlns:a16="http://schemas.microsoft.com/office/drawing/2014/main" id="{C49DDF54-23ED-8E88-BB7D-2321E0A7E522}"/>
               </a:ext>
             </a:extLst>
           </p:cNvPr>
@@ -6940,23 +7103,41 @@
             <p:ph type="title"/>
           </p:nvPr>
         </p:nvSpPr>
-        <p:spPr/>
+        <p:spPr>
+          <a:xfrm>
+            <a:off x="502912" y="1141340"/>
+            <a:ext cx="10890929" cy="1097280"/>
+          </a:xfrm>
+        </p:spPr>
         <p:txBody>
           <a:bodyPr>
-            <a:normAutofit fontScale="90000"/>
+            <a:normAutofit/>
           </a:bodyPr>
           <a:lstStyle/>
           <a:p>
             <a:r>
               <a:rPr lang="en-US" dirty="0"/>
-              <a:t>Data Cleaning </a:t>
-            </a:r>
-            <a:br>
+              <a:t>(2)</a:t>
+            </a:r>
+            <a:r>
+              <a:rPr lang="en-US" b="1" dirty="0">
+                <a:solidFill>
+                  <a:srgbClr val="FF0000"/>
+                </a:solidFill>
+              </a:rPr>
+              <a:t> </a:t>
+            </a:r>
+            <a:r>
+              <a:rPr lang="en-US" b="1" dirty="0" err="1">
+                <a:solidFill>
+                  <a:srgbClr val="FF0000"/>
+                </a:solidFill>
+              </a:rPr>
+              <a:t>Real_pct_change_quarterly</a:t>
+            </a:r>
+            <a:r>
               <a:rPr lang="en-US" dirty="0"/>
-            </a:br>
-            <a:r>
-              <a:rPr lang="en-US" dirty="0"/>
-              <a:t>13 F</a:t>
+              <a:t> </a:t>
             </a:r>
           </a:p>
         </p:txBody>
@@ -6966,7 +7147,7 @@
           <p:cNvPr id="3" name="Content Placeholder 2">
             <a:extLst>
               <a:ext uri="{FF2B5EF4-FFF2-40B4-BE49-F238E27FC236}">
-                <a16:creationId xmlns:a16="http://schemas.microsoft.com/office/drawing/2014/main" id="{348B4AD2-8728-51D6-ADCF-577F01E0614B}"/>
+                <a16:creationId xmlns:a16="http://schemas.microsoft.com/office/drawing/2014/main" id="{58962047-C16A-2459-7983-BD21002F7FB8}"/>
               </a:ext>
             </a:extLst>
           </p:cNvPr>
@@ -6988,10 +7169,10 @@
       </p:sp>
       <p:pic>
         <p:nvPicPr>
-          <p:cNvPr id="5" name="Picture 4">
-            <a:extLst>
-              <a:ext uri="{FF2B5EF4-FFF2-40B4-BE49-F238E27FC236}">
-                <a16:creationId xmlns:a16="http://schemas.microsoft.com/office/drawing/2014/main" id="{1669661C-6244-FE25-28FE-749802A85FB2}"/>
+          <p:cNvPr id="16" name="Picture 15">
+            <a:extLst>
+              <a:ext uri="{FF2B5EF4-FFF2-40B4-BE49-F238E27FC236}">
+                <a16:creationId xmlns:a16="http://schemas.microsoft.com/office/drawing/2014/main" id="{6D58BD9B-0114-0C96-C3C6-4E3A9EFA8E02}"/>
               </a:ext>
             </a:extLst>
           </p:cNvPr>
@@ -7008,8 +7189,8 @@
         </p:blipFill>
         <p:spPr>
           <a:xfrm>
-            <a:off x="3831651" y="325232"/>
-            <a:ext cx="6524204" cy="6381987"/>
+            <a:off x="327145" y="2238620"/>
+            <a:ext cx="11470193" cy="3667406"/>
           </a:xfrm>
           <a:prstGeom prst="rect">
             <a:avLst/>
@@ -7018,11 +7199,11 @@
       </p:pic>
       <p:sp>
         <p:nvSpPr>
-          <p:cNvPr id="10" name="Rectangle 9">
+          <p:cNvPr id="19" name="Rectangle 18">
             <a:hlinkClick r:id="rId4" action="ppaction://hlinksldjump"/>
             <a:extLst>
               <a:ext uri="{FF2B5EF4-FFF2-40B4-BE49-F238E27FC236}">
-                <a16:creationId xmlns:a16="http://schemas.microsoft.com/office/drawing/2014/main" id="{FF7C6B89-157E-0D3B-9A7C-8B54D6C4AC66}"/>
+                <a16:creationId xmlns:a16="http://schemas.microsoft.com/office/drawing/2014/main" id="{FB6E4377-E0B0-CE3B-43BD-C87AA77986EE}"/>
               </a:ext>
             </a:extLst>
           </p:cNvPr>
@@ -7031,8 +7212,8 @@
         </p:nvSpPr>
         <p:spPr>
           <a:xfrm>
-            <a:off x="448691" y="6036912"/>
-            <a:ext cx="1717288" cy="654621"/>
+            <a:off x="10081499" y="102977"/>
+            <a:ext cx="1296250" cy="503053"/>
           </a:xfrm>
           <a:prstGeom prst="rect">
             <a:avLst/>
@@ -7070,7 +7251,7 @@
     </p:spTree>
     <p:extLst>
       <p:ext uri="{BB962C8B-B14F-4D97-AF65-F5344CB8AC3E}">
-        <p14:creationId xmlns:p14="http://schemas.microsoft.com/office/powerpoint/2010/main" val="810694842"/>
+        <p14:creationId xmlns:p14="http://schemas.microsoft.com/office/powerpoint/2010/main" val="1986066791"/>
       </p:ext>
     </p:extLst>
   </p:cSld>
@@ -7102,7 +7283,7 @@
           <p:cNvPr id="2" name="Title 1">
             <a:extLst>
               <a:ext uri="{FF2B5EF4-FFF2-40B4-BE49-F238E27FC236}">
-                <a16:creationId xmlns:a16="http://schemas.microsoft.com/office/drawing/2014/main" id="{DBE3C0BA-A6CA-AE13-7939-3B2B04BCA16A}"/>
+                <a16:creationId xmlns:a16="http://schemas.microsoft.com/office/drawing/2014/main" id="{8C856D5A-B47F-50C8-C306-78A08F234222}"/>
               </a:ext>
             </a:extLst>
           </p:cNvPr>
@@ -7115,66 +7296,136 @@
         </p:nvSpPr>
         <p:spPr/>
         <p:txBody>
-          <a:bodyPr>
-            <a:normAutofit fontScale="90000"/>
-          </a:bodyPr>
+          <a:bodyPr/>
           <a:lstStyle/>
           <a:p>
             <a:r>
               <a:rPr lang="en-US" dirty="0"/>
-              <a:t>Data Cleaning</a:t>
-            </a:r>
-            <a:br>
+              <a:t>(2)</a:t>
+            </a:r>
+            <a:r>
+              <a:rPr lang="en-US" b="1" dirty="0">
+                <a:solidFill>
+                  <a:srgbClr val="FF0000"/>
+                </a:solidFill>
+              </a:rPr>
+              <a:t> </a:t>
+            </a:r>
+            <a:r>
+              <a:rPr lang="en-US" b="1" dirty="0" err="1">
+                <a:solidFill>
+                  <a:srgbClr val="FF0000"/>
+                </a:solidFill>
+              </a:rPr>
+              <a:t>Real_pct_change_quarterly</a:t>
+            </a:r>
+            <a:r>
+              <a:rPr lang="en-US" dirty="0">
+                <a:solidFill>
+                  <a:srgbClr val="FF0000"/>
+                </a:solidFill>
+              </a:rPr>
+              <a:t> </a:t>
+            </a:r>
+            <a:r>
               <a:rPr lang="en-US" dirty="0"/>
-            </a:br>
-            <a:r>
-              <a:rPr lang="en-US" dirty="0"/>
-              <a:t>Historical</a:t>
-            </a:r>
-            <a:r>
-              <a:rPr lang="zh-CN" altLang="en-US" dirty="0"/>
-              <a:t> </a:t>
-            </a:r>
-            <a:r>
-              <a:rPr lang="en-US" altLang="zh-CN" dirty="0"/>
-              <a:t>Stock Price</a:t>
-            </a:r>
+              <a:t>Motivation</a:t>
+            </a:r>
+          </a:p>
+        </p:txBody>
+      </p:sp>
+      <p:sp>
+        <p:nvSpPr>
+          <p:cNvPr id="3" name="Content Placeholder 2">
+            <a:extLst>
+              <a:ext uri="{FF2B5EF4-FFF2-40B4-BE49-F238E27FC236}">
+                <a16:creationId xmlns:a16="http://schemas.microsoft.com/office/drawing/2014/main" id="{C8FF2ED6-F1ED-4478-4EC7-56BD1D3E7EEF}"/>
+              </a:ext>
+            </a:extLst>
+          </p:cNvPr>
+          <p:cNvSpPr>
+            <a:spLocks noGrp="1"/>
+          </p:cNvSpPr>
+          <p:nvPr>
+            <p:ph idx="1"/>
+          </p:nvPr>
+        </p:nvSpPr>
+        <p:spPr/>
+        <p:txBody>
+          <a:bodyPr/>
+          <a:lstStyle/>
+          <a:p>
             <a:endParaRPr lang="en-US" dirty="0"/>
           </a:p>
         </p:txBody>
       </p:sp>
-      <p:sp>
-        <p:nvSpPr>
-          <p:cNvPr id="3" name="Content Placeholder 2">
-            <a:extLst>
-              <a:ext uri="{FF2B5EF4-FFF2-40B4-BE49-F238E27FC236}">
-                <a16:creationId xmlns:a16="http://schemas.microsoft.com/office/drawing/2014/main" id="{C8934A19-8B52-7B0B-53D6-7653EE0D9C2B}"/>
-              </a:ext>
-            </a:extLst>
-          </p:cNvPr>
-          <p:cNvSpPr>
-            <a:spLocks noGrp="1"/>
-          </p:cNvSpPr>
-          <p:nvPr>
-            <p:ph idx="1"/>
-          </p:nvPr>
-        </p:nvSpPr>
-        <p:spPr/>
-        <p:txBody>
-          <a:bodyPr/>
-          <a:lstStyle/>
-          <a:p>
-            <a:endParaRPr lang="en-US" dirty="0"/>
-          </a:p>
-        </p:txBody>
-      </p:sp>
-      <p:sp>
-        <p:nvSpPr>
-          <p:cNvPr id="5" name="Rectangle 4">
-            <a:hlinkClick r:id="rId2" action="ppaction://hlinksldjump"/>
-            <a:extLst>
-              <a:ext uri="{FF2B5EF4-FFF2-40B4-BE49-F238E27FC236}">
-                <a16:creationId xmlns:a16="http://schemas.microsoft.com/office/drawing/2014/main" id="{9EF979E1-B3E9-7A3D-4C51-CA889C043BEB}"/>
+      <p:pic>
+        <p:nvPicPr>
+          <p:cNvPr id="4" name="Picture 3">
+            <a:extLst>
+              <a:ext uri="{FF2B5EF4-FFF2-40B4-BE49-F238E27FC236}">
+                <a16:creationId xmlns:a16="http://schemas.microsoft.com/office/drawing/2014/main" id="{3858ADEA-8CB2-0368-1AD3-8C1284D852C8}"/>
+              </a:ext>
+            </a:extLst>
+          </p:cNvPr>
+          <p:cNvPicPr>
+            <a:picLocks noChangeAspect="1"/>
+          </p:cNvPicPr>
+          <p:nvPr/>
+        </p:nvPicPr>
+        <p:blipFill>
+          <a:blip r:embed="rId2"/>
+          <a:stretch>
+            <a:fillRect/>
+          </a:stretch>
+        </p:blipFill>
+        <p:spPr>
+          <a:xfrm>
+            <a:off x="282781" y="2380285"/>
+            <a:ext cx="6021766" cy="4168914"/>
+          </a:xfrm>
+          <a:prstGeom prst="rect">
+            <a:avLst/>
+          </a:prstGeom>
+        </p:spPr>
+      </p:pic>
+      <p:pic>
+        <p:nvPicPr>
+          <p:cNvPr id="5" name="Picture 4">
+            <a:extLst>
+              <a:ext uri="{FF2B5EF4-FFF2-40B4-BE49-F238E27FC236}">
+                <a16:creationId xmlns:a16="http://schemas.microsoft.com/office/drawing/2014/main" id="{99219D68-0D59-D691-1D9A-9DCA1D0406C4}"/>
+              </a:ext>
+            </a:extLst>
+          </p:cNvPr>
+          <p:cNvPicPr>
+            <a:picLocks noChangeAspect="1"/>
+          </p:cNvPicPr>
+          <p:nvPr/>
+        </p:nvPicPr>
+        <p:blipFill>
+          <a:blip r:embed="rId3"/>
+          <a:stretch>
+            <a:fillRect/>
+          </a:stretch>
+        </p:blipFill>
+        <p:spPr>
+          <a:xfrm>
+            <a:off x="5876796" y="2808382"/>
+            <a:ext cx="6081963" cy="2266914"/>
+          </a:xfrm>
+          <a:prstGeom prst="rect">
+            <a:avLst/>
+          </a:prstGeom>
+        </p:spPr>
+      </p:pic>
+      <p:sp>
+        <p:nvSpPr>
+          <p:cNvPr id="6" name="Rectangle 5">
+            <a:hlinkClick r:id="rId4" action="ppaction://hlinksldjump"/>
+            <a:extLst>
+              <a:ext uri="{FF2B5EF4-FFF2-40B4-BE49-F238E27FC236}">
+                <a16:creationId xmlns:a16="http://schemas.microsoft.com/office/drawing/2014/main" id="{32B41B5C-9A4F-EC08-F9F5-AB168CCB2437}"/>
               </a:ext>
             </a:extLst>
           </p:cNvPr>
@@ -7183,8 +7434,8 @@
         </p:nvSpPr>
         <p:spPr>
           <a:xfrm>
-            <a:off x="481771" y="5872321"/>
-            <a:ext cx="1717288" cy="654621"/>
+            <a:off x="10081499" y="102977"/>
+            <a:ext cx="1296250" cy="503053"/>
           </a:xfrm>
           <a:prstGeom prst="rect">
             <a:avLst/>
@@ -7219,40 +7470,10 @@
           </a:p>
         </p:txBody>
       </p:sp>
-      <p:pic>
-        <p:nvPicPr>
-          <p:cNvPr id="6" name="Picture 5">
-            <a:extLst>
-              <a:ext uri="{FF2B5EF4-FFF2-40B4-BE49-F238E27FC236}">
-                <a16:creationId xmlns:a16="http://schemas.microsoft.com/office/drawing/2014/main" id="{024E757A-C34E-DC7F-2DAF-EBDFCD1F3705}"/>
-              </a:ext>
-            </a:extLst>
-          </p:cNvPr>
-          <p:cNvPicPr>
-            <a:picLocks noChangeAspect="1"/>
-          </p:cNvPicPr>
-          <p:nvPr/>
-        </p:nvPicPr>
-        <p:blipFill>
-          <a:blip r:embed="rId3"/>
-          <a:stretch>
-            <a:fillRect/>
-          </a:stretch>
-        </p:blipFill>
-        <p:spPr>
-          <a:xfrm>
-            <a:off x="5528426" y="258231"/>
-            <a:ext cx="5323188" cy="6341537"/>
-          </a:xfrm>
-          <a:prstGeom prst="rect">
-            <a:avLst/>
-          </a:prstGeom>
-        </p:spPr>
-      </p:pic>
     </p:spTree>
     <p:extLst>
       <p:ext uri="{BB962C8B-B14F-4D97-AF65-F5344CB8AC3E}">
-        <p14:creationId xmlns:p14="http://schemas.microsoft.com/office/powerpoint/2010/main" val="621948934"/>
+        <p14:creationId xmlns:p14="http://schemas.microsoft.com/office/powerpoint/2010/main" val="2355815356"/>
       </p:ext>
     </p:extLst>
   </p:cSld>
@@ -7284,7 +7505,7 @@
           <p:cNvPr id="2" name="Title 1">
             <a:extLst>
               <a:ext uri="{FF2B5EF4-FFF2-40B4-BE49-F238E27FC236}">
-                <a16:creationId xmlns:a16="http://schemas.microsoft.com/office/drawing/2014/main" id="{A0CD481C-AEE5-1ED7-9B0D-3D4CE9C02C05}"/>
+                <a16:creationId xmlns:a16="http://schemas.microsoft.com/office/drawing/2014/main" id="{5BE8B769-B81F-6F4B-6684-BAA016269905}"/>
               </a:ext>
             </a:extLst>
           </p:cNvPr>
@@ -7297,13 +7518,59 @@
         </p:nvSpPr>
         <p:spPr/>
         <p:txBody>
-          <a:bodyPr/>
-          <a:lstStyle/>
-          <a:p>
-            <a:r>
-              <a:rPr lang="en-US" dirty="0"/>
-              <a:t>Variable Dimension Breakdown</a:t>
-            </a:r>
+          <a:bodyPr>
+            <a:normAutofit fontScale="90000"/>
+          </a:bodyPr>
+          <a:lstStyle/>
+          <a:p>
+            <a:r>
+              <a:rPr lang="en-US" b="1" dirty="0">
+                <a:solidFill>
+                  <a:srgbClr val="FF0000"/>
+                </a:solidFill>
+              </a:rPr>
+              <a:t>(3) </a:t>
+            </a:r>
+            <a:r>
+              <a:rPr lang="en-US" b="1" dirty="0" err="1">
+                <a:solidFill>
+                  <a:srgbClr val="FF0000"/>
+                </a:solidFill>
+              </a:rPr>
+              <a:t>Fund_pct_change</a:t>
+            </a:r>
+            <a:r>
+              <a:rPr lang="en-US" b="1" dirty="0">
+                <a:solidFill>
+                  <a:srgbClr val="FF0000"/>
+                </a:solidFill>
+              </a:rPr>
+              <a:t> (this </a:t>
+            </a:r>
+            <a:r>
+              <a:rPr lang="en-US" dirty="0">
+                <a:solidFill>
+                  <a:srgbClr val="FF0000"/>
+                </a:solidFill>
+              </a:rPr>
+              <a:t>example is AMZN</a:t>
+            </a:r>
+            <a:r>
+              <a:rPr lang="en-US" b="1" dirty="0">
+                <a:solidFill>
+                  <a:srgbClr val="FF0000"/>
+                </a:solidFill>
+              </a:rPr>
+              <a:t>)</a:t>
+            </a:r>
+            <a:br>
+              <a:rPr lang="en-US" b="1" dirty="0">
+                <a:solidFill>
+                  <a:srgbClr val="FF0000"/>
+                </a:solidFill>
+              </a:rPr>
+            </a:br>
+            <a:endParaRPr lang="en-US" dirty="0"/>
           </a:p>
         </p:txBody>
       </p:sp>
@@ -7312,7 +7579,7 @@
           <p:cNvPr id="3" name="Content Placeholder 2">
             <a:extLst>
               <a:ext uri="{FF2B5EF4-FFF2-40B4-BE49-F238E27FC236}">
-                <a16:creationId xmlns:a16="http://schemas.microsoft.com/office/drawing/2014/main" id="{1D42EEDE-EFC2-F9E3-6F78-41145D5DFE3B}"/>
+                <a16:creationId xmlns:a16="http://schemas.microsoft.com/office/drawing/2014/main" id="{2EDB7347-46E5-6734-F119-C654827B2C5B}"/>
               </a:ext>
             </a:extLst>
           </p:cNvPr>
@@ -7334,10 +7601,10 @@
       </p:sp>
       <p:pic>
         <p:nvPicPr>
-          <p:cNvPr id="6" name="Picture 5">
-            <a:extLst>
-              <a:ext uri="{FF2B5EF4-FFF2-40B4-BE49-F238E27FC236}">
-                <a16:creationId xmlns:a16="http://schemas.microsoft.com/office/drawing/2014/main" id="{881948EF-22C4-F80C-1EAE-DCDC72650155}"/>
+          <p:cNvPr id="4" name="Picture 3">
+            <a:extLst>
+              <a:ext uri="{FF2B5EF4-FFF2-40B4-BE49-F238E27FC236}">
+                <a16:creationId xmlns:a16="http://schemas.microsoft.com/office/drawing/2014/main" id="{8CE10FF3-77AE-121D-7120-D617FC4F11BE}"/>
               </a:ext>
             </a:extLst>
           </p:cNvPr>
@@ -7347,15 +7614,15 @@
           <p:nvPr/>
         </p:nvPicPr>
         <p:blipFill>
-          <a:blip r:embed="rId3"/>
+          <a:blip r:embed="rId2"/>
           <a:stretch>
             <a:fillRect/>
           </a:stretch>
         </p:blipFill>
         <p:spPr>
           <a:xfrm>
-            <a:off x="1177599" y="2633472"/>
-            <a:ext cx="10707701" cy="4897693"/>
+            <a:off x="660992" y="2581913"/>
+            <a:ext cx="11831962" cy="2904486"/>
           </a:xfrm>
           <a:prstGeom prst="rect">
             <a:avLst/>
@@ -7364,10 +7631,11 @@
       </p:pic>
       <p:sp>
         <p:nvSpPr>
-          <p:cNvPr id="8" name="Left Brace 7">
-            <a:extLst>
-              <a:ext uri="{FF2B5EF4-FFF2-40B4-BE49-F238E27FC236}">
-                <a16:creationId xmlns:a16="http://schemas.microsoft.com/office/drawing/2014/main" id="{340DF6E6-21FF-3755-301F-451E440DF4EC}"/>
+          <p:cNvPr id="6" name="Rectangle 5">
+            <a:hlinkClick r:id="rId3" action="ppaction://hlinksldjump"/>
+            <a:extLst>
+              <a:ext uri="{FF2B5EF4-FFF2-40B4-BE49-F238E27FC236}">
+                <a16:creationId xmlns:a16="http://schemas.microsoft.com/office/drawing/2014/main" id="{75C8DED7-1826-BAE0-645B-5263832D4D03}"/>
               </a:ext>
             </a:extLst>
           </p:cNvPr>
@@ -7376,81 +7644,46 @@
         </p:nvSpPr>
         <p:spPr>
           <a:xfrm>
-            <a:off x="1018457" y="4263533"/>
-            <a:ext cx="276522" cy="1368000"/>
-          </a:xfrm>
-          <a:prstGeom prst="leftBrace">
-            <a:avLst/>
-          </a:prstGeom>
-          <a:ln w="50800"/>
-        </p:spPr>
-        <p:style>
-          <a:lnRef idx="1">
-            <a:schemeClr val="accent5"/>
-          </a:lnRef>
-          <a:fillRef idx="0">
-            <a:schemeClr val="accent5"/>
-          </a:fillRef>
-          <a:effectRef idx="0">
-            <a:schemeClr val="accent5"/>
-          </a:effectRef>
-          <a:fontRef idx="minor">
-            <a:schemeClr val="tx1"/>
-          </a:fontRef>
-        </p:style>
-        <p:txBody>
-          <a:bodyPr rtlCol="0" anchor="ctr"/>
-          <a:lstStyle/>
-          <a:p>
-            <a:pPr algn="ctr"/>
-            <a:endParaRPr lang="en-US"/>
-          </a:p>
-        </p:txBody>
-      </p:sp>
-      <p:sp>
-        <p:nvSpPr>
-          <p:cNvPr id="9" name="TextBox 8">
-            <a:extLst>
-              <a:ext uri="{FF2B5EF4-FFF2-40B4-BE49-F238E27FC236}">
-                <a16:creationId xmlns:a16="http://schemas.microsoft.com/office/drawing/2014/main" id="{703D0896-5772-5FBA-9C50-A75188B253DA}"/>
-              </a:ext>
-            </a:extLst>
-          </p:cNvPr>
-          <p:cNvSpPr txBox="1"/>
-          <p:nvPr/>
-        </p:nvSpPr>
-        <p:spPr>
-          <a:xfrm>
-            <a:off x="28074" y="4624367"/>
-            <a:ext cx="1145753" cy="646331"/>
+            <a:off x="10081499" y="102977"/>
+            <a:ext cx="1296250" cy="503053"/>
           </a:xfrm>
           <a:prstGeom prst="rect">
             <a:avLst/>
           </a:prstGeom>
-          <a:noFill/>
         </p:spPr>
-        <p:txBody>
-          <a:bodyPr wrap="square" rtlCol="0">
-            <a:spAutoFit/>
-          </a:bodyPr>
+        <p:style>
+          <a:lnRef idx="2">
+            <a:schemeClr val="accent1">
+              <a:shade val="15000"/>
+            </a:schemeClr>
+          </a:lnRef>
+          <a:fillRef idx="1">
+            <a:schemeClr val="accent1"/>
+          </a:fillRef>
+          <a:effectRef idx="0">
+            <a:schemeClr val="accent1"/>
+          </a:effectRef>
+          <a:fontRef idx="minor">
+            <a:schemeClr val="lt1"/>
+          </a:fontRef>
+        </p:style>
+        <p:txBody>
+          <a:bodyPr rtlCol="0" anchor="ctr"/>
           <a:lstStyle/>
           <a:p>
             <a:pPr algn="ctr"/>
             <a:r>
-              <a:rPr lang="en-US" b="1" dirty="0">
-                <a:solidFill>
-                  <a:srgbClr val="FF0000"/>
-                </a:solidFill>
-              </a:rPr>
-              <a:t>Investor View</a:t>
-            </a:r>
+              <a:rPr lang="en-US" sz="2800" dirty="0"/>
+              <a:t>Return</a:t>
+            </a:r>
+            <a:endParaRPr lang="en-US" dirty="0"/>
           </a:p>
         </p:txBody>
       </p:sp>
     </p:spTree>
     <p:extLst>
       <p:ext uri="{BB962C8B-B14F-4D97-AF65-F5344CB8AC3E}">
-        <p14:creationId xmlns:p14="http://schemas.microsoft.com/office/powerpoint/2010/main" val="4010742043"/>
+        <p14:creationId xmlns:p14="http://schemas.microsoft.com/office/powerpoint/2010/main" val="668253455"/>
       </p:ext>
     </p:extLst>
   </p:cSld>
@@ -7482,7 +7715,7 @@
           <p:cNvPr id="2" name="Title 1">
             <a:extLst>
               <a:ext uri="{FF2B5EF4-FFF2-40B4-BE49-F238E27FC236}">
-                <a16:creationId xmlns:a16="http://schemas.microsoft.com/office/drawing/2014/main" id="{972EF352-CCE4-A8EF-3CD2-0A0B105C4C54}"/>
+                <a16:creationId xmlns:a16="http://schemas.microsoft.com/office/drawing/2014/main" id="{76BDB109-ACFA-6A0A-C7DE-B50FEDACE945}"/>
               </a:ext>
             </a:extLst>
           </p:cNvPr>
@@ -7493,21 +7726,34 @@
             <p:ph type="title"/>
           </p:nvPr>
         </p:nvSpPr>
-        <p:spPr>
-          <a:xfrm>
-            <a:off x="309573" y="1282804"/>
-            <a:ext cx="10890929" cy="1097280"/>
-          </a:xfrm>
-        </p:spPr>
-        <p:txBody>
-          <a:bodyPr>
-            <a:normAutofit/>
-          </a:bodyPr>
-          <a:lstStyle/>
-          <a:p>
-            <a:r>
-              <a:rPr lang="en-US" dirty="0"/>
-              <a:t>Which </a:t>
+        <p:spPr/>
+        <p:txBody>
+          <a:bodyPr/>
+          <a:lstStyle/>
+          <a:p>
+            <a:r>
+              <a:rPr lang="en-US" b="1" dirty="0">
+                <a:solidFill>
+                  <a:srgbClr val="FF0000"/>
+                </a:solidFill>
+              </a:rPr>
+              <a:t>(4) </a:t>
+            </a:r>
+            <a:r>
+              <a:rPr lang="en-US" b="1" dirty="0" err="1">
+                <a:solidFill>
+                  <a:srgbClr val="FF0000"/>
+                </a:solidFill>
+              </a:rPr>
+              <a:t>Fund_Impact</a:t>
+            </a:r>
+            <a:r>
+              <a:rPr lang="en-US" dirty="0" err="1">
+                <a:solidFill>
+                  <a:srgbClr val="FF0000"/>
+                </a:solidFill>
+              </a:rPr>
+              <a:t>_Summary</a:t>
             </a:r>
             <a:r>
               <a:rPr lang="en-US" dirty="0">
@@ -7515,12 +7761,9 @@
                   <a:srgbClr val="FF0000"/>
                 </a:solidFill>
               </a:rPr>
-              <a:t>n</a:t>
-            </a:r>
-            <a:r>
-              <a:rPr lang="en-US" dirty="0"/>
-              <a:t> hedge funds?</a:t>
-            </a:r>
+              <a:t> : n x(14 *4) matrix </a:t>
+            </a:r>
+            <a:endParaRPr lang="en-US" dirty="0"/>
           </a:p>
         </p:txBody>
       </p:sp>
@@ -7529,7 +7772,7 @@
           <p:cNvPr id="3" name="Content Placeholder 2">
             <a:extLst>
               <a:ext uri="{FF2B5EF4-FFF2-40B4-BE49-F238E27FC236}">
-                <a16:creationId xmlns:a16="http://schemas.microsoft.com/office/drawing/2014/main" id="{DCE94465-D3A9-0465-1ED5-272C1C2FEB0A}"/>
+                <a16:creationId xmlns:a16="http://schemas.microsoft.com/office/drawing/2014/main" id="{E7565BFC-51C1-EF97-7568-05B326F114AF}"/>
               </a:ext>
             </a:extLst>
           </p:cNvPr>
@@ -7540,98 +7783,21 @@
             <p:ph idx="1"/>
           </p:nvPr>
         </p:nvSpPr>
-        <p:spPr>
-          <a:xfrm>
-            <a:off x="154776" y="2181780"/>
-            <a:ext cx="6554495" cy="4373256"/>
-          </a:xfrm>
-        </p:spPr>
-        <p:txBody>
-          <a:bodyPr>
-            <a:normAutofit/>
-          </a:bodyPr>
-          <a:lstStyle/>
-          <a:p>
-            <a:r>
-              <a:rPr lang="en-GB" dirty="0"/>
-              <a:t>Select hedge funds that cumulatively account for the </a:t>
-            </a:r>
-            <a:r>
-              <a:rPr lang="en-GB" b="1" dirty="0">
-                <a:solidFill>
-                  <a:srgbClr val="FF0000"/>
-                </a:solidFill>
-              </a:rPr>
-              <a:t>top 90% of portfolio holdings</a:t>
-            </a:r>
-            <a:r>
-              <a:rPr lang="en-GB" dirty="0">
-                <a:solidFill>
-                  <a:srgbClr val="FF0000"/>
-                </a:solidFill>
-              </a:rPr>
-              <a:t> </a:t>
-            </a:r>
-            <a:r>
-              <a:rPr lang="en-GB" dirty="0"/>
-              <a:t>for each individual stock.</a:t>
-            </a:r>
-            <a:r>
-              <a:rPr lang="en-US" dirty="0"/>
-              <a:t>Include them all into our P and Q</a:t>
-            </a:r>
-          </a:p>
-          <a:p>
-            <a:r>
-              <a:rPr lang="en-GB" dirty="0"/>
-              <a:t>Take the </a:t>
-            </a:r>
-            <a:r>
-              <a:rPr lang="en-GB" b="1" dirty="0"/>
-              <a:t>union</a:t>
-            </a:r>
-            <a:r>
-              <a:rPr lang="en-GB" dirty="0"/>
-              <a:t> of these hedge funds across all 14 tech stocks, and include them in the construction of </a:t>
-            </a:r>
-            <a:r>
-              <a:rPr lang="en-GB" b="1" dirty="0"/>
-              <a:t>P and Q matrices</a:t>
-            </a:r>
-            <a:r>
-              <a:rPr lang="en-GB" dirty="0"/>
-              <a:t>.</a:t>
-            </a:r>
-            <a:endParaRPr lang="en-US" dirty="0"/>
-          </a:p>
-          <a:p>
-            <a:r>
-              <a:rPr lang="en-US" dirty="0"/>
-              <a:t>For example, Hedge Fund A hold 30% holding in Apple but only 0.1% in Amazon</a:t>
-            </a:r>
-          </a:p>
-          <a:p>
-            <a:pPr lvl="1"/>
-            <a:r>
-              <a:rPr lang="en-US" dirty="0"/>
-              <a:t>Then in the P matrix it will have higher weight to Apple and negligible weight to Amazon</a:t>
-            </a:r>
-          </a:p>
-          <a:p>
-            <a:pPr lvl="1"/>
-            <a:r>
-              <a:rPr lang="en-US" dirty="0"/>
-              <a:t>The P matrix will likely be Sparse</a:t>
-            </a:r>
+        <p:spPr/>
+        <p:txBody>
+          <a:bodyPr/>
+          <a:lstStyle/>
+          <a:p>
+            <a:endParaRPr lang="en-US"/>
           </a:p>
         </p:txBody>
       </p:sp>
       <p:pic>
         <p:nvPicPr>
-          <p:cNvPr id="10" name="Picture 9">
-            <a:extLst>
-              <a:ext uri="{FF2B5EF4-FFF2-40B4-BE49-F238E27FC236}">
-                <a16:creationId xmlns:a16="http://schemas.microsoft.com/office/drawing/2014/main" id="{E23B79F0-55EE-820C-40BF-F95AD26F0122}"/>
+          <p:cNvPr id="5" name="Picture 4">
+            <a:extLst>
+              <a:ext uri="{FF2B5EF4-FFF2-40B4-BE49-F238E27FC236}">
+                <a16:creationId xmlns:a16="http://schemas.microsoft.com/office/drawing/2014/main" id="{93398439-AA20-8AEB-0A4F-0D90108D6098}"/>
               </a:ext>
             </a:extLst>
           </p:cNvPr>
@@ -7648,18 +7814,69 @@
         </p:blipFill>
         <p:spPr>
           <a:xfrm>
-            <a:off x="6629400" y="1043236"/>
-            <a:ext cx="5562600" cy="5511800"/>
+            <a:off x="1636923" y="2065387"/>
+            <a:ext cx="8498596" cy="4647465"/>
           </a:xfrm>
           <a:prstGeom prst="rect">
             <a:avLst/>
           </a:prstGeom>
         </p:spPr>
       </p:pic>
+      <p:sp>
+        <p:nvSpPr>
+          <p:cNvPr id="6" name="Rectangle 5">
+            <a:hlinkClick r:id="rId3" action="ppaction://hlinksldjump"/>
+            <a:extLst>
+              <a:ext uri="{FF2B5EF4-FFF2-40B4-BE49-F238E27FC236}">
+                <a16:creationId xmlns:a16="http://schemas.microsoft.com/office/drawing/2014/main" id="{515C2C82-7F45-FB4A-6F7E-E3E6869636D4}"/>
+              </a:ext>
+            </a:extLst>
+          </p:cNvPr>
+          <p:cNvSpPr/>
+          <p:nvPr/>
+        </p:nvSpPr>
+        <p:spPr>
+          <a:xfrm>
+            <a:off x="10081499" y="102977"/>
+            <a:ext cx="1296250" cy="503053"/>
+          </a:xfrm>
+          <a:prstGeom prst="rect">
+            <a:avLst/>
+          </a:prstGeom>
+        </p:spPr>
+        <p:style>
+          <a:lnRef idx="2">
+            <a:schemeClr val="accent1">
+              <a:shade val="15000"/>
+            </a:schemeClr>
+          </a:lnRef>
+          <a:fillRef idx="1">
+            <a:schemeClr val="accent1"/>
+          </a:fillRef>
+          <a:effectRef idx="0">
+            <a:schemeClr val="accent1"/>
+          </a:effectRef>
+          <a:fontRef idx="minor">
+            <a:schemeClr val="lt1"/>
+          </a:fontRef>
+        </p:style>
+        <p:txBody>
+          <a:bodyPr rtlCol="0" anchor="ctr"/>
+          <a:lstStyle/>
+          <a:p>
+            <a:pPr algn="ctr"/>
+            <a:r>
+              <a:rPr lang="en-US" sz="2800" dirty="0"/>
+              <a:t>Return</a:t>
+            </a:r>
+            <a:endParaRPr lang="en-US" dirty="0"/>
+          </a:p>
+        </p:txBody>
+      </p:sp>
     </p:spTree>
     <p:extLst>
       <p:ext uri="{BB962C8B-B14F-4D97-AF65-F5344CB8AC3E}">
-        <p14:creationId xmlns:p14="http://schemas.microsoft.com/office/powerpoint/2010/main" val="2198815853"/>
+        <p14:creationId xmlns:p14="http://schemas.microsoft.com/office/powerpoint/2010/main" val="4002152639"/>
       </p:ext>
     </p:extLst>
   </p:cSld>
